--- a/docs/Sentinel-Platform-Deck.pptx
+++ b/docs/Sentinel-Platform-Deck.pptx
@@ -4,9 +4,6 @@
   <p:sldMasterIdLst>
     <p:sldMasterId id="2147483648" r:id="rId1"/>
   </p:sldMasterIdLst>
-  <p:notesMasterIdLst>
-    <p:notesMasterId r:id="rId17"/>
-  </p:notesMasterIdLst>
   <p:sldIdLst>
     <p:sldId id="256" r:id="rId2"/>
     <p:sldId id="257" r:id="rId3"/>
@@ -24,7 +21,10 @@
     <p:sldId id="269" r:id="rId15"/>
     <p:sldId id="270" r:id="rId16"/>
   </p:sldIdLst>
-  <p:sldSz cx="9144000" cy="5143500" type="screen16x9"/>
+  <p:notesMasterIdLst>
+    <p:notesMasterId r:id="rId17"/>
+  </p:notesMasterIdLst>
+  <p:sldSz cx="9144000" cy="5143500"/>
   <p:notesSz cx="5143500" cy="9144000"/>
   <p:defaultTextStyle>
     <a:lvl1pPr marL="0" algn="l" defTabSz="914400" rtl="0" eaLnBrk="1" latinLnBrk="0" hangingPunct="1">
@@ -118,11 +118,6 @@
       </a:defRPr>
     </a:lvl9pPr>
   </p:defaultTextStyle>
-  <p:extLst>
-    <p:ext uri="{EFAFB233-063F-42B5-8137-9DF3F51BA10A}">
-      <p15:sldGuideLst xmlns:p15="http://schemas.microsoft.com/office/powerpoint/2012/main"/>
-    </p:ext>
-  </p:extLst>
 </p:presentation>
 </file>
 
@@ -148,10 +143,234 @@
           <a:chExt cx="0" cy="0"/>
         </a:xfrm>
       </p:grpSpPr>
+      <p:sp>
+        <p:nvSpPr>
+          <p:cNvPr id="2" name="Header Placeholder 1"/>
+          <p:cNvSpPr>
+            <a:spLocks noGrp="1"/>
+          </p:cNvSpPr>
+          <p:nvPr>
+            <p:ph type="hdr" sz="quarter"/>
+          </p:nvPr>
+        </p:nvSpPr>
+        <p:spPr>
+          <a:xfrm>
+            <a:off x="0" y="0"/>
+            <a:ext cx="2971800" cy="458788"/>
+          </a:xfrm>
+          <a:prstGeom prst="rect">
+            <a:avLst/>
+          </a:prstGeom>
+        </p:spPr>
+        <p:txBody>
+          <a:bodyPr vert="horz" lIns="91440" tIns="45720" rIns="91440" bIns="45720" rtlCol="0"/>
+          <a:lstStyle>
+            <a:lvl1pPr algn="l">
+              <a:defRPr sz="1200"/>
+            </a:lvl1pPr>
+          </a:lstStyle>
+          <a:p>
+            <a:endParaRPr lang="en-US"/>
+          </a:p>
+        </p:txBody>
+      </p:sp>
+      <p:sp>
+        <p:nvSpPr>
+          <p:cNvPr id="3" name="Date Placeholder 2"/>
+          <p:cNvSpPr>
+            <a:spLocks noGrp="1"/>
+          </p:cNvSpPr>
+          <p:nvPr>
+            <p:ph type="dt" idx="1"/>
+          </p:nvPr>
+        </p:nvSpPr>
+        <p:spPr>
+          <a:xfrm>
+            <a:off x="3884613" y="0"/>
+            <a:ext cx="2971800" cy="458788"/>
+          </a:xfrm>
+          <a:prstGeom prst="rect">
+            <a:avLst/>
+          </a:prstGeom>
+        </p:spPr>
+        <p:txBody>
+          <a:bodyPr vert="horz" lIns="91440" tIns="45720" rIns="91440" bIns="45720" rtlCol="0"/>
+          <a:lstStyle>
+            <a:lvl1pPr algn="r">
+              <a:defRPr sz="1200"/>
+            </a:lvl1pPr>
+          </a:lstStyle>
+          <a:p>
+            <a:fld id="{5282F153-3F37-0F45-9E97-73ACFA13230C}" type="datetimeFigureOut">
+              <a:rPr lang="en-US"/>
+              <a:t>7/23/19</a:t>
+            </a:fld>
+            <a:endParaRPr lang="en-US"/>
+          </a:p>
+        </p:txBody>
+      </p:sp>
+      <p:sp>
+        <p:nvSpPr>
+          <p:cNvPr id="4" name="Slide Image Placeholder 3"/>
+          <p:cNvSpPr>
+            <a:spLocks noGrp="1" noRot="1" noChangeAspect="1"/>
+          </p:cNvSpPr>
+          <p:nvPr>
+            <p:ph type="sldImg" idx="2"/>
+          </p:nvPr>
+        </p:nvSpPr>
+        <p:spPr>
+          <a:xfrm>
+            <a:off x="685800" y="1143000"/>
+            <a:ext cx="5486400" cy="3086100"/>
+          </a:xfrm>
+          <a:prstGeom prst="rect">
+            <a:avLst/>
+          </a:prstGeom>
+          <a:noFill/>
+          <a:ln w="12700">
+            <a:solidFill>
+              <a:prstClr val="black"/>
+            </a:solidFill>
+          </a:ln>
+        </p:spPr>
+        <p:txBody>
+          <a:bodyPr vert="horz" lIns="91440" tIns="45720" rIns="91440" bIns="45720" rtlCol="0" anchor="ctr"/>
+          <a:lstStyle/>
+          <a:p>
+            <a:endParaRPr lang="en-US"/>
+          </a:p>
+        </p:txBody>
+      </p:sp>
+      <p:sp>
+        <p:nvSpPr>
+          <p:cNvPr id="5" name="Notes Placeholder 4"/>
+          <p:cNvSpPr>
+            <a:spLocks noGrp="1"/>
+          </p:cNvSpPr>
+          <p:nvPr>
+            <p:ph type="body" sz="quarter" idx="3"/>
+          </p:nvPr>
+        </p:nvSpPr>
+        <p:spPr>
+          <a:xfrm>
+            <a:off x="685800" y="4400550"/>
+            <a:ext cx="5486400" cy="3600450"/>
+          </a:xfrm>
+          <a:prstGeom prst="rect">
+            <a:avLst/>
+          </a:prstGeom>
+        </p:spPr>
+        <p:txBody>
+          <a:bodyPr vert="horz" lIns="91440" tIns="45720" rIns="91440" bIns="45720" rtlCol="0"/>
+          <a:lstStyle/>
+          <a:p>
+            <a:pPr lvl="0"/>
+            <a:r>
+              <a:rPr lang="en-US"/>
+              <a:t>Click to edit Master text styles</a:t>
+            </a:r>
+          </a:p>
+          <a:p>
+            <a:pPr lvl="1"/>
+            <a:r>
+              <a:rPr lang="en-US"/>
+              <a:t>Second level</a:t>
+            </a:r>
+          </a:p>
+          <a:p>
+            <a:pPr lvl="2"/>
+            <a:r>
+              <a:rPr lang="en-US"/>
+              <a:t>Third level</a:t>
+            </a:r>
+          </a:p>
+          <a:p>
+            <a:pPr lvl="3"/>
+            <a:r>
+              <a:rPr lang="en-US"/>
+              <a:t>Fourth level</a:t>
+            </a:r>
+          </a:p>
+          <a:p>
+            <a:pPr lvl="4"/>
+            <a:r>
+              <a:rPr lang="en-US"/>
+              <a:t>Fifth level</a:t>
+            </a:r>
+          </a:p>
+        </p:txBody>
+      </p:sp>
+      <p:sp>
+        <p:nvSpPr>
+          <p:cNvPr id="6" name="Footer Placeholder 5"/>
+          <p:cNvSpPr>
+            <a:spLocks noGrp="1"/>
+          </p:cNvSpPr>
+          <p:nvPr>
+            <p:ph type="ftr" sz="quarter" idx="4"/>
+          </p:nvPr>
+        </p:nvSpPr>
+        <p:spPr>
+          <a:xfrm>
+            <a:off x="0" y="8685213"/>
+            <a:ext cx="2971800" cy="458787"/>
+          </a:xfrm>
+          <a:prstGeom prst="rect">
+            <a:avLst/>
+          </a:prstGeom>
+        </p:spPr>
+        <p:txBody>
+          <a:bodyPr vert="horz" lIns="91440" tIns="45720" rIns="91440" bIns="45720" rtlCol="0" anchor="b"/>
+          <a:lstStyle>
+            <a:lvl1pPr algn="l">
+              <a:defRPr sz="1200"/>
+            </a:lvl1pPr>
+          </a:lstStyle>
+          <a:p>
+            <a:endParaRPr lang="en-US"/>
+          </a:p>
+        </p:txBody>
+      </p:sp>
+      <p:sp>
+        <p:nvSpPr>
+          <p:cNvPr id="7" name="Slide Number Placeholder 6"/>
+          <p:cNvSpPr>
+            <a:spLocks noGrp="1"/>
+          </p:cNvSpPr>
+          <p:nvPr>
+            <p:ph type="sldNum" sz="quarter" idx="5"/>
+          </p:nvPr>
+        </p:nvSpPr>
+        <p:spPr>
+          <a:xfrm>
+            <a:off x="3884613" y="8685213"/>
+            <a:ext cx="2971800" cy="458787"/>
+          </a:xfrm>
+          <a:prstGeom prst="rect">
+            <a:avLst/>
+          </a:prstGeom>
+        </p:spPr>
+        <p:txBody>
+          <a:bodyPr vert="horz" lIns="91440" tIns="45720" rIns="91440" bIns="45720" rtlCol="0" anchor="b"/>
+          <a:lstStyle>
+            <a:lvl1pPr algn="r">
+              <a:defRPr sz="1200"/>
+            </a:lvl1pPr>
+          </a:lstStyle>
+          <a:p>
+            <a:fld id="{CE5E9CC1-C706-0F49-92D6-E571CC5EEA8F}" type="slidenum">
+              <a:rPr lang="en-US"/>
+              <a:t>‹#›</a:t>
+            </a:fld>
+            <a:endParaRPr lang="en-US"/>
+          </a:p>
+        </p:txBody>
+      </p:sp>
     </p:spTree>
     <p:extLst>
       <p:ext uri="{BB962C8B-B14F-4D97-AF65-F5344CB8AC3E}">
-        <p14:creationId xmlns:p14="http://schemas.microsoft.com/office/powerpoint/2010/main" val="2001208732"/>
+        <p14:creationId xmlns:p14="http://schemas.microsoft.com/office/powerpoint/2010/main" val="1024086991"/>
       </p:ext>
     </p:extLst>
   </p:cSld>
@@ -295,6 +514,10 @@
           <a:bodyPr/>
           <a:lstStyle/>
           <a:p>
+            <a:r>
+              <a:rPr lang="en-US" dirty="0"/>
+              <a:t/>
+            </a:r>
             <a:endParaRPr lang="en-US" dirty="0"/>
           </a:p>
         </p:txBody>
@@ -379,6 +602,10 @@
           <a:bodyPr/>
           <a:lstStyle/>
           <a:p>
+            <a:r>
+              <a:rPr lang="en-US" dirty="0"/>
+              <a:t/>
+            </a:r>
             <a:endParaRPr lang="en-US" dirty="0"/>
           </a:p>
         </p:txBody>
@@ -463,6 +690,10 @@
           <a:bodyPr/>
           <a:lstStyle/>
           <a:p>
+            <a:r>
+              <a:rPr lang="en-US" dirty="0"/>
+              <a:t/>
+            </a:r>
             <a:endParaRPr lang="en-US" dirty="0"/>
           </a:p>
         </p:txBody>
@@ -547,6 +778,10 @@
           <a:bodyPr/>
           <a:lstStyle/>
           <a:p>
+            <a:r>
+              <a:rPr lang="en-US" dirty="0"/>
+              <a:t/>
+            </a:r>
             <a:endParaRPr lang="en-US" dirty="0"/>
           </a:p>
         </p:txBody>
@@ -631,6 +866,10 @@
           <a:bodyPr/>
           <a:lstStyle/>
           <a:p>
+            <a:r>
+              <a:rPr lang="en-US" dirty="0"/>
+              <a:t/>
+            </a:r>
             <a:endParaRPr lang="en-US" dirty="0"/>
           </a:p>
         </p:txBody>
@@ -715,6 +954,10 @@
           <a:bodyPr/>
           <a:lstStyle/>
           <a:p>
+            <a:r>
+              <a:rPr lang="en-US" dirty="0"/>
+              <a:t/>
+            </a:r>
             <a:endParaRPr lang="en-US" dirty="0"/>
           </a:p>
         </p:txBody>
@@ -799,6 +1042,10 @@
           <a:bodyPr/>
           <a:lstStyle/>
           <a:p>
+            <a:r>
+              <a:rPr lang="en-US" dirty="0"/>
+              <a:t/>
+            </a:r>
             <a:endParaRPr lang="en-US" dirty="0"/>
           </a:p>
         </p:txBody>
@@ -883,6 +1130,10 @@
           <a:bodyPr/>
           <a:lstStyle/>
           <a:p>
+            <a:r>
+              <a:rPr lang="en-US" dirty="0"/>
+              <a:t/>
+            </a:r>
             <a:endParaRPr lang="en-US" dirty="0"/>
           </a:p>
         </p:txBody>
@@ -967,6 +1218,10 @@
           <a:bodyPr/>
           <a:lstStyle/>
           <a:p>
+            <a:r>
+              <a:rPr lang="en-US" dirty="0"/>
+              <a:t/>
+            </a:r>
             <a:endParaRPr lang="en-US" dirty="0"/>
           </a:p>
         </p:txBody>
@@ -1051,6 +1306,10 @@
           <a:bodyPr/>
           <a:lstStyle/>
           <a:p>
+            <a:r>
+              <a:rPr lang="en-US" dirty="0"/>
+              <a:t/>
+            </a:r>
             <a:endParaRPr lang="en-US" dirty="0"/>
           </a:p>
         </p:txBody>
@@ -1135,6 +1394,10 @@
           <a:bodyPr/>
           <a:lstStyle/>
           <a:p>
+            <a:r>
+              <a:rPr lang="en-US" dirty="0"/>
+              <a:t/>
+            </a:r>
             <a:endParaRPr lang="en-US" dirty="0"/>
           </a:p>
         </p:txBody>
@@ -1219,6 +1482,10 @@
           <a:bodyPr/>
           <a:lstStyle/>
           <a:p>
+            <a:r>
+              <a:rPr lang="en-US" dirty="0"/>
+              <a:t/>
+            </a:r>
             <a:endParaRPr lang="en-US" dirty="0"/>
           </a:p>
         </p:txBody>
@@ -1303,6 +1570,10 @@
           <a:bodyPr/>
           <a:lstStyle/>
           <a:p>
+            <a:r>
+              <a:rPr lang="en-US" dirty="0"/>
+              <a:t/>
+            </a:r>
             <a:endParaRPr lang="en-US" dirty="0"/>
           </a:p>
         </p:txBody>
@@ -1387,6 +1658,10 @@
           <a:bodyPr/>
           <a:lstStyle/>
           <a:p>
+            <a:r>
+              <a:rPr lang="en-US" dirty="0"/>
+              <a:t/>
+            </a:r>
             <a:endParaRPr lang="en-US" dirty="0"/>
           </a:p>
         </p:txBody>
@@ -1471,6 +1746,10 @@
           <a:bodyPr/>
           <a:lstStyle/>
           <a:p>
+            <a:r>
+              <a:rPr lang="en-US" dirty="0"/>
+              <a:t/>
+            </a:r>
             <a:endParaRPr lang="en-US" dirty="0"/>
           </a:p>
         </p:txBody>
@@ -1544,11 +1823,6 @@
 <file path=ppt/slideMasters/slideMaster1.xml><?xml version="1.0" encoding="utf-8"?>
 <p:sldMaster xmlns:a="http://schemas.openxmlformats.org/drawingml/2006/main" xmlns:r="http://schemas.openxmlformats.org/officeDocument/2006/relationships" xmlns:p="http://schemas.openxmlformats.org/presentationml/2006/main">
   <p:cSld>
-    <p:bg>
-      <p:bgRef idx="1001">
-        <a:schemeClr val="bg1"/>
-      </p:bgRef>
-    </p:bg>
     <p:spTree>
       <p:nvGrpSpPr>
         <p:cNvPr id="1" name=""/>
@@ -1831,7 +2105,6 @@
         <a:solidFill>
           <a:srgbClr val="0B0E14"/>
         </a:solidFill>
-        <a:effectLst/>
       </p:bgPr>
     </p:bg>
     <p:spTree>
@@ -1867,13 +2140,6 @@
           </a:solidFill>
           <a:ln/>
         </p:spPr>
-        <p:txBody>
-          <a:bodyPr/>
-          <a:lstStyle/>
-          <a:p>
-            <a:endParaRPr lang="en-US"/>
-          </a:p>
-        </p:txBody>
       </p:sp>
       <p:sp>
         <p:nvSpPr>
@@ -1896,11 +2162,11 @@
           <a:bodyPr wrap="square" lIns="0" tIns="0" rIns="0" bIns="0" rtlCol="0" anchor="ctr"/>
           <a:lstStyle/>
           <a:p>
-            <a:pPr marL="0" indent="0">
-              <a:buNone/>
-            </a:pPr>
-            <a:r>
-              <a:rPr lang="en-US" sz="5800" b="1" kern="0" spc="300" dirty="0">
+            <a:pPr indent="0" marL="0">
+              <a:buNone/>
+            </a:pPr>
+            <a:r>
+              <a:rPr lang="en-US" sz="5800" b="1" spc="300" kern="0" dirty="0">
                 <a:solidFill>
                   <a:srgbClr val="E8EDF5"/>
                 </a:solidFill>
@@ -1935,7 +2201,7 @@
           <a:bodyPr wrap="square" lIns="0" tIns="0" rIns="0" bIns="0" rtlCol="0" anchor="ctr"/>
           <a:lstStyle/>
           <a:p>
-            <a:pPr marL="0" indent="0">
+            <a:pPr indent="0" marL="0">
               <a:buNone/>
             </a:pPr>
             <a:r>
@@ -1974,7 +2240,7 @@
           <a:bodyPr wrap="square" lIns="0" tIns="0" rIns="0" bIns="0" rtlCol="0" anchor="ctr"/>
           <a:lstStyle/>
           <a:p>
-            <a:pPr marL="0" indent="0">
+            <a:pPr indent="0" marL="0">
               <a:buNone/>
             </a:pPr>
             <a:r>
@@ -2013,11 +2279,11 @@
           <a:bodyPr wrap="square" lIns="0" tIns="0" rIns="0" bIns="0" rtlCol="0" anchor="ctr"/>
           <a:lstStyle/>
           <a:p>
-            <a:pPr marL="0" indent="0">
-              <a:buNone/>
-            </a:pPr>
-            <a:r>
-              <a:rPr lang="en-US" sz="1050" kern="0" spc="100" dirty="0">
+            <a:pPr indent="0" marL="0">
+              <a:buNone/>
+            </a:pPr>
+            <a:r>
+              <a:rPr lang="en-US" sz="1050" spc="100" kern="0" dirty="0">
                 <a:solidFill>
                   <a:srgbClr val="AEBACB"/>
                 </a:solidFill>
@@ -2047,7 +2313,6 @@
         <a:solidFill>
           <a:srgbClr val="0B0E14"/>
         </a:solidFill>
-        <a:effectLst/>
       </p:bgPr>
     </p:bg>
     <p:spTree>
@@ -2083,13 +2348,6 @@
           </a:solidFill>
           <a:ln/>
         </p:spPr>
-        <p:txBody>
-          <a:bodyPr/>
-          <a:lstStyle/>
-          <a:p>
-            <a:endParaRPr lang="en-US"/>
-          </a:p>
-        </p:txBody>
       </p:sp>
       <p:sp>
         <p:nvSpPr>
@@ -2112,11 +2370,11 @@
           <a:bodyPr wrap="square" lIns="0" tIns="0" rIns="0" bIns="0" rtlCol="0" anchor="ctr"/>
           <a:lstStyle/>
           <a:p>
-            <a:pPr marL="0" indent="0">
-              <a:buNone/>
-            </a:pPr>
-            <a:r>
-              <a:rPr lang="en-US" sz="1000" b="1" kern="0" spc="200" dirty="0">
+            <a:pPr indent="0" marL="0">
+              <a:buNone/>
+            </a:pPr>
+            <a:r>
+              <a:rPr lang="en-US" sz="1000" b="1" spc="200" kern="0" dirty="0">
                 <a:solidFill>
                   <a:srgbClr val="6EE7A8"/>
                 </a:solidFill>
@@ -2151,7 +2409,7 @@
           <a:bodyPr wrap="square" lIns="0" tIns="0" rIns="0" bIns="0" rtlCol="0" anchor="t"/>
           <a:lstStyle/>
           <a:p>
-            <a:pPr marL="0" indent="0">
+            <a:pPr indent="0" marL="0">
               <a:buNone/>
             </a:pPr>
             <a:r>
@@ -2190,7 +2448,7 @@
           <a:bodyPr wrap="square" lIns="0" tIns="0" rIns="0" bIns="0" rtlCol="0" anchor="t"/>
           <a:lstStyle/>
           <a:p>
-            <a:pPr marL="0" indent="0">
+            <a:pPr indent="0" marL="0">
               <a:buNone/>
             </a:pPr>
             <a:r>
@@ -2227,13 +2485,6 @@
           </a:solidFill>
           <a:ln/>
         </p:spPr>
-        <p:txBody>
-          <a:bodyPr/>
-          <a:lstStyle/>
-          <a:p>
-            <a:endParaRPr lang="en-US"/>
-          </a:p>
-        </p:txBody>
       </p:sp>
       <p:sp>
         <p:nvSpPr>
@@ -2254,13 +2505,6 @@
           </a:solidFill>
           <a:ln/>
         </p:spPr>
-        <p:txBody>
-          <a:bodyPr/>
-          <a:lstStyle/>
-          <a:p>
-            <a:endParaRPr lang="en-US"/>
-          </a:p>
-        </p:txBody>
       </p:sp>
       <p:sp>
         <p:nvSpPr>
@@ -2283,7 +2527,7 @@
           <a:bodyPr wrap="square" lIns="0" tIns="0" rIns="0" bIns="0" rtlCol="0" anchor="t"/>
           <a:lstStyle/>
           <a:p>
-            <a:pPr marL="0" indent="0">
+            <a:pPr indent="0" marL="0">
               <a:buNone/>
             </a:pPr>
             <a:r>
@@ -2322,7 +2566,7 @@
           <a:bodyPr wrap="square" lIns="0" tIns="0" rIns="0" bIns="0" rtlCol="0" anchor="t"/>
           <a:lstStyle/>
           <a:p>
-            <a:pPr marL="0" indent="0">
+            <a:pPr indent="0" marL="0">
               <a:buNone/>
             </a:pPr>
             <a:r>
@@ -2359,13 +2603,6 @@
           </a:solidFill>
           <a:ln/>
         </p:spPr>
-        <p:txBody>
-          <a:bodyPr/>
-          <a:lstStyle/>
-          <a:p>
-            <a:endParaRPr lang="en-US"/>
-          </a:p>
-        </p:txBody>
       </p:sp>
       <p:sp>
         <p:nvSpPr>
@@ -2386,13 +2623,6 @@
           </a:solidFill>
           <a:ln/>
         </p:spPr>
-        <p:txBody>
-          <a:bodyPr/>
-          <a:lstStyle/>
-          <a:p>
-            <a:endParaRPr lang="en-US"/>
-          </a:p>
-        </p:txBody>
       </p:sp>
       <p:sp>
         <p:nvSpPr>
@@ -2415,7 +2645,7 @@
           <a:bodyPr wrap="square" lIns="0" tIns="0" rIns="0" bIns="0" rtlCol="0" anchor="t"/>
           <a:lstStyle/>
           <a:p>
-            <a:pPr marL="0" indent="0">
+            <a:pPr indent="0" marL="0">
               <a:buNone/>
             </a:pPr>
             <a:r>
@@ -2454,7 +2684,7 @@
           <a:bodyPr wrap="square" lIns="0" tIns="0" rIns="0" bIns="0" rtlCol="0" anchor="t"/>
           <a:lstStyle/>
           <a:p>
-            <a:pPr marL="0" indent="0">
+            <a:pPr indent="0" marL="0">
               <a:buNone/>
             </a:pPr>
             <a:r>
@@ -2491,13 +2721,6 @@
           </a:solidFill>
           <a:ln/>
         </p:spPr>
-        <p:txBody>
-          <a:bodyPr/>
-          <a:lstStyle/>
-          <a:p>
-            <a:endParaRPr lang="en-US"/>
-          </a:p>
-        </p:txBody>
       </p:sp>
       <p:sp>
         <p:nvSpPr>
@@ -2518,13 +2741,6 @@
           </a:solidFill>
           <a:ln/>
         </p:spPr>
-        <p:txBody>
-          <a:bodyPr/>
-          <a:lstStyle/>
-          <a:p>
-            <a:endParaRPr lang="en-US"/>
-          </a:p>
-        </p:txBody>
       </p:sp>
       <p:sp>
         <p:nvSpPr>
@@ -2547,7 +2763,7 @@
           <a:bodyPr wrap="square" lIns="0" tIns="0" rIns="0" bIns="0" rtlCol="0" anchor="t"/>
           <a:lstStyle/>
           <a:p>
-            <a:pPr marL="0" indent="0">
+            <a:pPr indent="0" marL="0">
               <a:buNone/>
             </a:pPr>
             <a:r>
@@ -2586,7 +2802,7 @@
           <a:bodyPr wrap="square" lIns="0" tIns="0" rIns="0" bIns="0" rtlCol="0" anchor="t"/>
           <a:lstStyle/>
           <a:p>
-            <a:pPr marL="0" indent="0">
+            <a:pPr indent="0" marL="0">
               <a:buNone/>
             </a:pPr>
             <a:r>
@@ -2623,13 +2839,6 @@
           </a:solidFill>
           <a:ln/>
         </p:spPr>
-        <p:txBody>
-          <a:bodyPr/>
-          <a:lstStyle/>
-          <a:p>
-            <a:endParaRPr lang="en-US"/>
-          </a:p>
-        </p:txBody>
       </p:sp>
       <p:sp>
         <p:nvSpPr>
@@ -2650,13 +2859,6 @@
           </a:solidFill>
           <a:ln/>
         </p:spPr>
-        <p:txBody>
-          <a:bodyPr/>
-          <a:lstStyle/>
-          <a:p>
-            <a:endParaRPr lang="en-US"/>
-          </a:p>
-        </p:txBody>
       </p:sp>
       <p:sp>
         <p:nvSpPr>
@@ -2679,7 +2881,7 @@
           <a:bodyPr wrap="square" lIns="0" tIns="0" rIns="0" bIns="0" rtlCol="0" anchor="t"/>
           <a:lstStyle/>
           <a:p>
-            <a:pPr marL="0" indent="0">
+            <a:pPr indent="0" marL="0">
               <a:buNone/>
             </a:pPr>
             <a:r>
@@ -2718,7 +2920,7 @@
           <a:bodyPr wrap="square" lIns="0" tIns="0" rIns="0" bIns="0" rtlCol="0" anchor="t"/>
           <a:lstStyle/>
           <a:p>
-            <a:pPr marL="0" indent="0">
+            <a:pPr indent="0" marL="0">
               <a:buNone/>
             </a:pPr>
             <a:r>
@@ -2757,7 +2959,7 @@
           <a:bodyPr wrap="square" lIns="0" tIns="0" rIns="0" bIns="0" rtlCol="0" anchor="t"/>
           <a:lstStyle/>
           <a:p>
-            <a:pPr marL="0" indent="0">
+            <a:pPr indent="0" marL="0">
               <a:buNone/>
             </a:pPr>
             <a:r>
@@ -2796,7 +2998,7 @@
           <a:bodyPr wrap="square" lIns="0" tIns="0" rIns="0" bIns="0" rtlCol="0" anchor="ctr"/>
           <a:lstStyle/>
           <a:p>
-            <a:pPr marL="0" indent="0">
+            <a:pPr indent="0" marL="0">
               <a:buNone/>
             </a:pPr>
             <a:r>
@@ -2830,7 +3032,6 @@
         <a:solidFill>
           <a:srgbClr val="0B0E14"/>
         </a:solidFill>
-        <a:effectLst/>
       </p:bgPr>
     </p:bg>
     <p:spTree>
@@ -2866,13 +3067,6 @@
           </a:solidFill>
           <a:ln/>
         </p:spPr>
-        <p:txBody>
-          <a:bodyPr/>
-          <a:lstStyle/>
-          <a:p>
-            <a:endParaRPr lang="en-US"/>
-          </a:p>
-        </p:txBody>
       </p:sp>
       <p:sp>
         <p:nvSpPr>
@@ -2895,11 +3089,11 @@
           <a:bodyPr wrap="square" lIns="0" tIns="0" rIns="0" bIns="0" rtlCol="0" anchor="ctr"/>
           <a:lstStyle/>
           <a:p>
-            <a:pPr marL="0" indent="0">
-              <a:buNone/>
-            </a:pPr>
-            <a:r>
-              <a:rPr lang="en-US" sz="1000" b="1" kern="0" spc="200" dirty="0">
+            <a:pPr indent="0" marL="0">
+              <a:buNone/>
+            </a:pPr>
+            <a:r>
+              <a:rPr lang="en-US" sz="1000" b="1" spc="200" kern="0" dirty="0">
                 <a:solidFill>
                   <a:srgbClr val="6EE7A8"/>
                 </a:solidFill>
@@ -2934,7 +3128,7 @@
           <a:bodyPr wrap="square" lIns="0" tIns="0" rIns="0" bIns="0" rtlCol="0" anchor="t"/>
           <a:lstStyle/>
           <a:p>
-            <a:pPr marL="0" indent="0">
+            <a:pPr indent="0" marL="0">
               <a:buNone/>
             </a:pPr>
             <a:r>
@@ -2973,7 +3167,7 @@
           <a:bodyPr wrap="square" lIns="0" tIns="0" rIns="0" bIns="0" rtlCol="0" anchor="t"/>
           <a:lstStyle/>
           <a:p>
-            <a:pPr marL="0" indent="0">
+            <a:pPr indent="0" marL="0">
               <a:buNone/>
             </a:pPr>
             <a:r>
@@ -3010,13 +3204,6 @@
           </a:solidFill>
           <a:ln/>
         </p:spPr>
-        <p:txBody>
-          <a:bodyPr/>
-          <a:lstStyle/>
-          <a:p>
-            <a:endParaRPr lang="en-US"/>
-          </a:p>
-        </p:txBody>
       </p:sp>
       <p:sp>
         <p:nvSpPr>
@@ -3037,13 +3224,6 @@
           </a:solidFill>
           <a:ln/>
         </p:spPr>
-        <p:txBody>
-          <a:bodyPr/>
-          <a:lstStyle/>
-          <a:p>
-            <a:endParaRPr lang="en-US"/>
-          </a:p>
-        </p:txBody>
       </p:sp>
       <p:sp>
         <p:nvSpPr>
@@ -3066,7 +3246,7 @@
           <a:bodyPr wrap="square" lIns="0" tIns="0" rIns="0" bIns="0" rtlCol="0" anchor="ctr"/>
           <a:lstStyle/>
           <a:p>
-            <a:pPr marL="0" indent="0">
+            <a:pPr indent="0" marL="0">
               <a:buNone/>
             </a:pPr>
             <a:r>
@@ -3105,7 +3285,7 @@
           <a:bodyPr wrap="square" lIns="0" tIns="0" rIns="0" bIns="0" rtlCol="0" anchor="ctr"/>
           <a:lstStyle/>
           <a:p>
-            <a:pPr marL="0" indent="0">
+            <a:pPr indent="0" marL="0">
               <a:buNone/>
             </a:pPr>
             <a:r>
@@ -3144,7 +3324,7 @@
           <a:bodyPr wrap="square" lIns="0" tIns="0" rIns="0" bIns="0" rtlCol="0" anchor="ctr"/>
           <a:lstStyle/>
           <a:p>
-            <a:pPr marL="0" indent="0">
+            <a:pPr indent="0" marL="0">
               <a:buNone/>
             </a:pPr>
             <a:r>
@@ -3181,13 +3361,6 @@
           </a:solidFill>
           <a:ln/>
         </p:spPr>
-        <p:txBody>
-          <a:bodyPr/>
-          <a:lstStyle/>
-          <a:p>
-            <a:endParaRPr lang="en-US"/>
-          </a:p>
-        </p:txBody>
       </p:sp>
       <p:sp>
         <p:nvSpPr>
@@ -3208,13 +3381,6 @@
           </a:solidFill>
           <a:ln/>
         </p:spPr>
-        <p:txBody>
-          <a:bodyPr/>
-          <a:lstStyle/>
-          <a:p>
-            <a:endParaRPr lang="en-US"/>
-          </a:p>
-        </p:txBody>
       </p:sp>
       <p:sp>
         <p:nvSpPr>
@@ -3237,7 +3403,7 @@
           <a:bodyPr wrap="square" lIns="0" tIns="0" rIns="0" bIns="0" rtlCol="0" anchor="ctr"/>
           <a:lstStyle/>
           <a:p>
-            <a:pPr marL="0" indent="0">
+            <a:pPr indent="0" marL="0">
               <a:buNone/>
             </a:pPr>
             <a:r>
@@ -3276,7 +3442,7 @@
           <a:bodyPr wrap="square" lIns="0" tIns="0" rIns="0" bIns="0" rtlCol="0" anchor="ctr"/>
           <a:lstStyle/>
           <a:p>
-            <a:pPr marL="0" indent="0">
+            <a:pPr indent="0" marL="0">
               <a:buNone/>
             </a:pPr>
             <a:r>
@@ -3315,7 +3481,7 @@
           <a:bodyPr wrap="square" lIns="0" tIns="0" rIns="0" bIns="0" rtlCol="0" anchor="ctr"/>
           <a:lstStyle/>
           <a:p>
-            <a:pPr marL="0" indent="0">
+            <a:pPr indent="0" marL="0">
               <a:buNone/>
             </a:pPr>
             <a:r>
@@ -3352,13 +3518,6 @@
           </a:solidFill>
           <a:ln/>
         </p:spPr>
-        <p:txBody>
-          <a:bodyPr/>
-          <a:lstStyle/>
-          <a:p>
-            <a:endParaRPr lang="en-US"/>
-          </a:p>
-        </p:txBody>
       </p:sp>
       <p:sp>
         <p:nvSpPr>
@@ -3379,13 +3538,6 @@
           </a:solidFill>
           <a:ln/>
         </p:spPr>
-        <p:txBody>
-          <a:bodyPr/>
-          <a:lstStyle/>
-          <a:p>
-            <a:endParaRPr lang="en-US"/>
-          </a:p>
-        </p:txBody>
       </p:sp>
       <p:sp>
         <p:nvSpPr>
@@ -3408,7 +3560,7 @@
           <a:bodyPr wrap="square" lIns="0" tIns="0" rIns="0" bIns="0" rtlCol="0" anchor="ctr"/>
           <a:lstStyle/>
           <a:p>
-            <a:pPr marL="0" indent="0">
+            <a:pPr indent="0" marL="0">
               <a:buNone/>
             </a:pPr>
             <a:r>
@@ -3447,7 +3599,7 @@
           <a:bodyPr wrap="square" lIns="0" tIns="0" rIns="0" bIns="0" rtlCol="0" anchor="ctr"/>
           <a:lstStyle/>
           <a:p>
-            <a:pPr marL="0" indent="0">
+            <a:pPr indent="0" marL="0">
               <a:buNone/>
             </a:pPr>
             <a:r>
@@ -3486,7 +3638,7 @@
           <a:bodyPr wrap="square" lIns="0" tIns="0" rIns="0" bIns="0" rtlCol="0" anchor="ctr"/>
           <a:lstStyle/>
           <a:p>
-            <a:pPr marL="0" indent="0">
+            <a:pPr indent="0" marL="0">
               <a:buNone/>
             </a:pPr>
             <a:r>
@@ -3523,13 +3675,6 @@
           </a:solidFill>
           <a:ln/>
         </p:spPr>
-        <p:txBody>
-          <a:bodyPr/>
-          <a:lstStyle/>
-          <a:p>
-            <a:endParaRPr lang="en-US"/>
-          </a:p>
-        </p:txBody>
       </p:sp>
       <p:sp>
         <p:nvSpPr>
@@ -3550,13 +3695,6 @@
           </a:solidFill>
           <a:ln/>
         </p:spPr>
-        <p:txBody>
-          <a:bodyPr/>
-          <a:lstStyle/>
-          <a:p>
-            <a:endParaRPr lang="en-US"/>
-          </a:p>
-        </p:txBody>
       </p:sp>
       <p:sp>
         <p:nvSpPr>
@@ -3579,7 +3717,7 @@
           <a:bodyPr wrap="square" lIns="0" tIns="0" rIns="0" bIns="0" rtlCol="0" anchor="ctr"/>
           <a:lstStyle/>
           <a:p>
-            <a:pPr marL="0" indent="0">
+            <a:pPr indent="0" marL="0">
               <a:buNone/>
             </a:pPr>
             <a:r>
@@ -3618,7 +3756,7 @@
           <a:bodyPr wrap="square" lIns="0" tIns="0" rIns="0" bIns="0" rtlCol="0" anchor="ctr"/>
           <a:lstStyle/>
           <a:p>
-            <a:pPr marL="0" indent="0">
+            <a:pPr indent="0" marL="0">
               <a:buNone/>
             </a:pPr>
             <a:r>
@@ -3657,7 +3795,7 @@
           <a:bodyPr wrap="square" lIns="0" tIns="0" rIns="0" bIns="0" rtlCol="0" anchor="ctr"/>
           <a:lstStyle/>
           <a:p>
-            <a:pPr marL="0" indent="0">
+            <a:pPr indent="0" marL="0">
               <a:buNone/>
             </a:pPr>
             <a:r>
@@ -3691,7 +3829,6 @@
         <a:solidFill>
           <a:srgbClr val="0B0E14"/>
         </a:solidFill>
-        <a:effectLst/>
       </p:bgPr>
     </p:bg>
     <p:spTree>
@@ -3727,13 +3864,6 @@
           </a:solidFill>
           <a:ln/>
         </p:spPr>
-        <p:txBody>
-          <a:bodyPr/>
-          <a:lstStyle/>
-          <a:p>
-            <a:endParaRPr lang="en-US"/>
-          </a:p>
-        </p:txBody>
       </p:sp>
       <p:sp>
         <p:nvSpPr>
@@ -3756,11 +3886,11 @@
           <a:bodyPr wrap="square" lIns="0" tIns="0" rIns="0" bIns="0" rtlCol="0" anchor="ctr"/>
           <a:lstStyle/>
           <a:p>
-            <a:pPr marL="0" indent="0">
-              <a:buNone/>
-            </a:pPr>
-            <a:r>
-              <a:rPr lang="en-US" sz="1000" b="1" kern="0" spc="200" dirty="0">
+            <a:pPr indent="0" marL="0">
+              <a:buNone/>
+            </a:pPr>
+            <a:r>
+              <a:rPr lang="en-US" sz="1000" b="1" spc="200" kern="0" dirty="0">
                 <a:solidFill>
                   <a:srgbClr val="6EE7A8"/>
                 </a:solidFill>
@@ -3795,7 +3925,7 @@
           <a:bodyPr wrap="square" lIns="0" tIns="0" rIns="0" bIns="0" rtlCol="0" anchor="t"/>
           <a:lstStyle/>
           <a:p>
-            <a:pPr marL="0" indent="0">
+            <a:pPr indent="0" marL="0">
               <a:buNone/>
             </a:pPr>
             <a:r>
@@ -3834,7 +3964,7 @@
           <a:bodyPr wrap="square" lIns="0" tIns="0" rIns="0" bIns="0" rtlCol="0" anchor="t"/>
           <a:lstStyle/>
           <a:p>
-            <a:pPr marL="0" indent="0">
+            <a:pPr indent="0" marL="0">
               <a:buNone/>
             </a:pPr>
             <a:r>
@@ -3871,13 +4001,6 @@
           </a:solidFill>
           <a:ln/>
         </p:spPr>
-        <p:txBody>
-          <a:bodyPr/>
-          <a:lstStyle/>
-          <a:p>
-            <a:endParaRPr lang="en-US"/>
-          </a:p>
-        </p:txBody>
       </p:sp>
       <p:sp>
         <p:nvSpPr>
@@ -3898,13 +4021,6 @@
           </a:solidFill>
           <a:ln/>
         </p:spPr>
-        <p:txBody>
-          <a:bodyPr/>
-          <a:lstStyle/>
-          <a:p>
-            <a:endParaRPr lang="en-US"/>
-          </a:p>
-        </p:txBody>
       </p:sp>
       <p:sp>
         <p:nvSpPr>
@@ -3927,7 +4043,7 @@
           <a:bodyPr wrap="square" lIns="0" tIns="0" rIns="0" bIns="0" rtlCol="0" anchor="ctr"/>
           <a:lstStyle/>
           <a:p>
-            <a:pPr marL="0" indent="0">
+            <a:pPr indent="0" marL="0">
               <a:buNone/>
             </a:pPr>
             <a:r>
@@ -3966,7 +4082,7 @@
           <a:bodyPr wrap="square" lIns="0" tIns="0" rIns="0" bIns="0" rtlCol="0" anchor="ctr"/>
           <a:lstStyle/>
           <a:p>
-            <a:pPr marL="0" indent="0">
+            <a:pPr indent="0" marL="0">
               <a:buNone/>
             </a:pPr>
             <a:r>
@@ -4005,7 +4121,7 @@
           <a:bodyPr wrap="square" lIns="0" tIns="0" rIns="0" bIns="0" rtlCol="0" anchor="ctr"/>
           <a:lstStyle/>
           <a:p>
-            <a:pPr marL="0" indent="0">
+            <a:pPr indent="0" marL="0">
               <a:buNone/>
             </a:pPr>
             <a:r>
@@ -4042,13 +4158,6 @@
           </a:solidFill>
           <a:ln/>
         </p:spPr>
-        <p:txBody>
-          <a:bodyPr/>
-          <a:lstStyle/>
-          <a:p>
-            <a:endParaRPr lang="en-US"/>
-          </a:p>
-        </p:txBody>
       </p:sp>
       <p:sp>
         <p:nvSpPr>
@@ -4069,13 +4178,6 @@
           </a:solidFill>
           <a:ln/>
         </p:spPr>
-        <p:txBody>
-          <a:bodyPr/>
-          <a:lstStyle/>
-          <a:p>
-            <a:endParaRPr lang="en-US"/>
-          </a:p>
-        </p:txBody>
       </p:sp>
       <p:sp>
         <p:nvSpPr>
@@ -4098,7 +4200,7 @@
           <a:bodyPr wrap="square" lIns="0" tIns="0" rIns="0" bIns="0" rtlCol="0" anchor="ctr"/>
           <a:lstStyle/>
           <a:p>
-            <a:pPr marL="0" indent="0">
+            <a:pPr indent="0" marL="0">
               <a:buNone/>
             </a:pPr>
             <a:r>
@@ -4137,7 +4239,7 @@
           <a:bodyPr wrap="square" lIns="0" tIns="0" rIns="0" bIns="0" rtlCol="0" anchor="ctr"/>
           <a:lstStyle/>
           <a:p>
-            <a:pPr marL="0" indent="0">
+            <a:pPr indent="0" marL="0">
               <a:buNone/>
             </a:pPr>
             <a:r>
@@ -4176,7 +4278,7 @@
           <a:bodyPr wrap="square" lIns="0" tIns="0" rIns="0" bIns="0" rtlCol="0" anchor="ctr"/>
           <a:lstStyle/>
           <a:p>
-            <a:pPr marL="0" indent="0">
+            <a:pPr indent="0" marL="0">
               <a:buNone/>
             </a:pPr>
             <a:r>
@@ -4213,13 +4315,6 @@
           </a:solidFill>
           <a:ln/>
         </p:spPr>
-        <p:txBody>
-          <a:bodyPr/>
-          <a:lstStyle/>
-          <a:p>
-            <a:endParaRPr lang="en-US"/>
-          </a:p>
-        </p:txBody>
       </p:sp>
       <p:sp>
         <p:nvSpPr>
@@ -4240,13 +4335,6 @@
           </a:solidFill>
           <a:ln/>
         </p:spPr>
-        <p:txBody>
-          <a:bodyPr/>
-          <a:lstStyle/>
-          <a:p>
-            <a:endParaRPr lang="en-US"/>
-          </a:p>
-        </p:txBody>
       </p:sp>
       <p:sp>
         <p:nvSpPr>
@@ -4269,7 +4357,7 @@
           <a:bodyPr wrap="square" lIns="0" tIns="0" rIns="0" bIns="0" rtlCol="0" anchor="ctr"/>
           <a:lstStyle/>
           <a:p>
-            <a:pPr marL="0" indent="0">
+            <a:pPr indent="0" marL="0">
               <a:buNone/>
             </a:pPr>
             <a:r>
@@ -4308,7 +4396,7 @@
           <a:bodyPr wrap="square" lIns="0" tIns="0" rIns="0" bIns="0" rtlCol="0" anchor="ctr"/>
           <a:lstStyle/>
           <a:p>
-            <a:pPr marL="0" indent="0">
+            <a:pPr indent="0" marL="0">
               <a:buNone/>
             </a:pPr>
             <a:r>
@@ -4347,7 +4435,7 @@
           <a:bodyPr wrap="square" lIns="0" tIns="0" rIns="0" bIns="0" rtlCol="0" anchor="ctr"/>
           <a:lstStyle/>
           <a:p>
-            <a:pPr marL="0" indent="0">
+            <a:pPr indent="0" marL="0">
               <a:buNone/>
             </a:pPr>
             <a:r>
@@ -4384,13 +4472,6 @@
           </a:solidFill>
           <a:ln/>
         </p:spPr>
-        <p:txBody>
-          <a:bodyPr/>
-          <a:lstStyle/>
-          <a:p>
-            <a:endParaRPr lang="en-US"/>
-          </a:p>
-        </p:txBody>
       </p:sp>
       <p:sp>
         <p:nvSpPr>
@@ -4411,13 +4492,6 @@
           </a:solidFill>
           <a:ln/>
         </p:spPr>
-        <p:txBody>
-          <a:bodyPr/>
-          <a:lstStyle/>
-          <a:p>
-            <a:endParaRPr lang="en-US"/>
-          </a:p>
-        </p:txBody>
       </p:sp>
       <p:sp>
         <p:nvSpPr>
@@ -4440,7 +4514,7 @@
           <a:bodyPr wrap="square" lIns="0" tIns="0" rIns="0" bIns="0" rtlCol="0" anchor="t"/>
           <a:lstStyle/>
           <a:p>
-            <a:pPr marL="0" indent="0">
+            <a:pPr indent="0" marL="0">
               <a:buNone/>
             </a:pPr>
             <a:r>
@@ -4479,7 +4553,7 @@
           <a:bodyPr wrap="square" lIns="0" tIns="0" rIns="0" bIns="0" rtlCol="0" anchor="t"/>
           <a:lstStyle/>
           <a:p>
-            <a:pPr marL="0" indent="0">
+            <a:pPr indent="0" marL="0">
               <a:buNone/>
             </a:pPr>
             <a:r>
@@ -4518,7 +4592,7 @@
           <a:bodyPr wrap="square" lIns="0" tIns="0" rIns="0" bIns="0" rtlCol="0" anchor="t"/>
           <a:lstStyle/>
           <a:p>
-            <a:pPr marL="0" indent="0">
+            <a:pPr indent="0" marL="0">
               <a:buNone/>
             </a:pPr>
             <a:r>
@@ -4535,7 +4609,7 @@
             <a:endParaRPr lang="en-US" sz="1050" dirty="0"/>
           </a:p>
           <a:p>
-            <a:pPr marL="0" indent="0">
+            <a:pPr indent="0" marL="0">
               <a:buNone/>
             </a:pPr>
             <a:r>
@@ -4574,7 +4648,7 @@
           <a:bodyPr wrap="square" lIns="0" tIns="0" rIns="0" bIns="0" rtlCol="0" anchor="ctr"/>
           <a:lstStyle/>
           <a:p>
-            <a:pPr marL="0" indent="0">
+            <a:pPr indent="0" marL="0">
               <a:buNone/>
             </a:pPr>
             <a:r>
@@ -4608,7 +4682,6 @@
         <a:solidFill>
           <a:srgbClr val="0B0E14"/>
         </a:solidFill>
-        <a:effectLst/>
       </p:bgPr>
     </p:bg>
     <p:spTree>
@@ -4644,13 +4717,6 @@
           </a:solidFill>
           <a:ln/>
         </p:spPr>
-        <p:txBody>
-          <a:bodyPr/>
-          <a:lstStyle/>
-          <a:p>
-            <a:endParaRPr lang="en-US"/>
-          </a:p>
-        </p:txBody>
       </p:sp>
       <p:sp>
         <p:nvSpPr>
@@ -4673,11 +4739,11 @@
           <a:bodyPr wrap="square" lIns="0" tIns="0" rIns="0" bIns="0" rtlCol="0" anchor="ctr"/>
           <a:lstStyle/>
           <a:p>
-            <a:pPr marL="0" indent="0">
-              <a:buNone/>
-            </a:pPr>
-            <a:r>
-              <a:rPr lang="en-US" sz="1000" b="1" kern="0" spc="200" dirty="0">
+            <a:pPr indent="0" marL="0">
+              <a:buNone/>
+            </a:pPr>
+            <a:r>
+              <a:rPr lang="en-US" sz="1000" b="1" spc="200" kern="0" dirty="0">
                 <a:solidFill>
                   <a:srgbClr val="6EE7A8"/>
                 </a:solidFill>
@@ -4712,7 +4778,7 @@
           <a:bodyPr wrap="square" lIns="0" tIns="0" rIns="0" bIns="0" rtlCol="0" anchor="t"/>
           <a:lstStyle/>
           <a:p>
-            <a:pPr marL="0" indent="0">
+            <a:pPr indent="0" marL="0">
               <a:buNone/>
             </a:pPr>
             <a:r>
@@ -4751,7 +4817,7 @@
           <a:bodyPr wrap="square" lIns="0" tIns="0" rIns="0" bIns="0" rtlCol="0" anchor="t"/>
           <a:lstStyle/>
           <a:p>
-            <a:pPr marL="0" indent="0">
+            <a:pPr indent="0" marL="0">
               <a:buNone/>
             </a:pPr>
             <a:r>
@@ -4788,13 +4854,6 @@
           </a:solidFill>
           <a:ln/>
         </p:spPr>
-        <p:txBody>
-          <a:bodyPr/>
-          <a:lstStyle/>
-          <a:p>
-            <a:endParaRPr lang="en-US"/>
-          </a:p>
-        </p:txBody>
       </p:sp>
       <p:sp>
         <p:nvSpPr>
@@ -4817,7 +4876,7 @@
           <a:bodyPr wrap="square" lIns="0" tIns="0" rIns="0" bIns="0" rtlCol="0" anchor="ctr"/>
           <a:lstStyle/>
           <a:p>
-            <a:pPr marL="0" indent="0">
+            <a:pPr indent="0" marL="0">
               <a:buNone/>
             </a:pPr>
             <a:r>
@@ -4856,7 +4915,7 @@
           <a:bodyPr wrap="square" lIns="0" tIns="0" rIns="0" bIns="0" rtlCol="0" anchor="t"/>
           <a:lstStyle/>
           <a:p>
-            <a:pPr marL="0" indent="0">
+            <a:pPr indent="0" marL="0">
               <a:buNone/>
             </a:pPr>
             <a:r>
@@ -4893,13 +4952,6 @@
           </a:solidFill>
           <a:ln/>
         </p:spPr>
-        <p:txBody>
-          <a:bodyPr/>
-          <a:lstStyle/>
-          <a:p>
-            <a:endParaRPr lang="en-US"/>
-          </a:p>
-        </p:txBody>
       </p:sp>
       <p:sp>
         <p:nvSpPr>
@@ -4922,7 +4974,7 @@
           <a:bodyPr wrap="square" lIns="0" tIns="0" rIns="0" bIns="0" rtlCol="0" anchor="ctr"/>
           <a:lstStyle/>
           <a:p>
-            <a:pPr marL="0" indent="0">
+            <a:pPr indent="0" marL="0">
               <a:buNone/>
             </a:pPr>
             <a:r>
@@ -4961,7 +5013,7 @@
           <a:bodyPr wrap="square" lIns="0" tIns="0" rIns="0" bIns="0" rtlCol="0" anchor="t"/>
           <a:lstStyle/>
           <a:p>
-            <a:pPr marL="0" indent="0">
+            <a:pPr indent="0" marL="0">
               <a:buNone/>
             </a:pPr>
             <a:r>
@@ -4998,13 +5050,6 @@
           </a:solidFill>
           <a:ln/>
         </p:spPr>
-        <p:txBody>
-          <a:bodyPr/>
-          <a:lstStyle/>
-          <a:p>
-            <a:endParaRPr lang="en-US"/>
-          </a:p>
-        </p:txBody>
       </p:sp>
       <p:sp>
         <p:nvSpPr>
@@ -5027,7 +5072,7 @@
           <a:bodyPr wrap="square" lIns="0" tIns="0" rIns="0" bIns="0" rtlCol="0" anchor="ctr"/>
           <a:lstStyle/>
           <a:p>
-            <a:pPr marL="0" indent="0">
+            <a:pPr indent="0" marL="0">
               <a:buNone/>
             </a:pPr>
             <a:r>
@@ -5066,7 +5111,7 @@
           <a:bodyPr wrap="square" lIns="0" tIns="0" rIns="0" bIns="0" rtlCol="0" anchor="t"/>
           <a:lstStyle/>
           <a:p>
-            <a:pPr marL="0" indent="0">
+            <a:pPr indent="0" marL="0">
               <a:buNone/>
             </a:pPr>
             <a:r>
@@ -5103,13 +5148,6 @@
           </a:solidFill>
           <a:ln/>
         </p:spPr>
-        <p:txBody>
-          <a:bodyPr/>
-          <a:lstStyle/>
-          <a:p>
-            <a:endParaRPr lang="en-US"/>
-          </a:p>
-        </p:txBody>
       </p:sp>
       <p:sp>
         <p:nvSpPr>
@@ -5132,7 +5170,7 @@
           <a:bodyPr wrap="square" lIns="0" tIns="0" rIns="0" bIns="0" rtlCol="0" anchor="ctr"/>
           <a:lstStyle/>
           <a:p>
-            <a:pPr marL="0" indent="0">
+            <a:pPr indent="0" marL="0">
               <a:buNone/>
             </a:pPr>
             <a:r>
@@ -5171,7 +5209,7 @@
           <a:bodyPr wrap="square" lIns="0" tIns="0" rIns="0" bIns="0" rtlCol="0" anchor="t"/>
           <a:lstStyle/>
           <a:p>
-            <a:pPr marL="0" indent="0">
+            <a:pPr indent="0" marL="0">
               <a:buNone/>
             </a:pPr>
             <a:r>
@@ -5208,13 +5246,6 @@
           </a:solidFill>
           <a:ln/>
         </p:spPr>
-        <p:txBody>
-          <a:bodyPr/>
-          <a:lstStyle/>
-          <a:p>
-            <a:endParaRPr lang="en-US"/>
-          </a:p>
-        </p:txBody>
       </p:sp>
       <p:sp>
         <p:nvSpPr>
@@ -5237,7 +5268,7 @@
           <a:bodyPr wrap="square" lIns="0" tIns="0" rIns="0" bIns="0" rtlCol="0" anchor="ctr"/>
           <a:lstStyle/>
           <a:p>
-            <a:pPr marL="0" indent="0">
+            <a:pPr indent="0" marL="0">
               <a:buNone/>
             </a:pPr>
             <a:r>
@@ -5276,7 +5307,7 @@
           <a:bodyPr wrap="square" lIns="0" tIns="0" rIns="0" bIns="0" rtlCol="0" anchor="t"/>
           <a:lstStyle/>
           <a:p>
-            <a:pPr marL="0" indent="0">
+            <a:pPr indent="0" marL="0">
               <a:buNone/>
             </a:pPr>
             <a:r>
@@ -5310,7 +5341,6 @@
         <a:solidFill>
           <a:srgbClr val="0B0E14"/>
         </a:solidFill>
-        <a:effectLst/>
       </p:bgPr>
     </p:bg>
     <p:spTree>
@@ -5346,13 +5376,6 @@
           </a:solidFill>
           <a:ln/>
         </p:spPr>
-        <p:txBody>
-          <a:bodyPr/>
-          <a:lstStyle/>
-          <a:p>
-            <a:endParaRPr lang="en-US"/>
-          </a:p>
-        </p:txBody>
       </p:sp>
       <p:sp>
         <p:nvSpPr>
@@ -5375,11 +5398,11 @@
           <a:bodyPr wrap="square" lIns="0" tIns="0" rIns="0" bIns="0" rtlCol="0" anchor="ctr"/>
           <a:lstStyle/>
           <a:p>
-            <a:pPr marL="0" indent="0">
-              <a:buNone/>
-            </a:pPr>
-            <a:r>
-              <a:rPr lang="en-US" sz="1000" b="1" kern="0" spc="200" dirty="0">
+            <a:pPr indent="0" marL="0">
+              <a:buNone/>
+            </a:pPr>
+            <a:r>
+              <a:rPr lang="en-US" sz="1000" b="1" spc="200" kern="0" dirty="0">
                 <a:solidFill>
                   <a:srgbClr val="F5B759"/>
                 </a:solidFill>
@@ -5414,7 +5437,7 @@
           <a:bodyPr wrap="square" lIns="0" tIns="0" rIns="0" bIns="0" rtlCol="0" anchor="t"/>
           <a:lstStyle/>
           <a:p>
-            <a:pPr marL="0" indent="0">
+            <a:pPr indent="0" marL="0">
               <a:buNone/>
             </a:pPr>
             <a:r>
@@ -5453,7 +5476,7 @@
           <a:bodyPr wrap="square" lIns="0" tIns="0" rIns="0" bIns="0" rtlCol="0" anchor="t"/>
           <a:lstStyle/>
           <a:p>
-            <a:pPr marL="0" indent="0">
+            <a:pPr indent="0" marL="0">
               <a:buNone/>
             </a:pPr>
             <a:r>
@@ -5490,13 +5513,6 @@
           </a:solidFill>
           <a:ln/>
         </p:spPr>
-        <p:txBody>
-          <a:bodyPr/>
-          <a:lstStyle/>
-          <a:p>
-            <a:endParaRPr lang="en-US"/>
-          </a:p>
-        </p:txBody>
       </p:sp>
       <p:sp>
         <p:nvSpPr>
@@ -5517,13 +5533,6 @@
           </a:solidFill>
           <a:ln/>
         </p:spPr>
-        <p:txBody>
-          <a:bodyPr/>
-          <a:lstStyle/>
-          <a:p>
-            <a:endParaRPr lang="en-US"/>
-          </a:p>
-        </p:txBody>
       </p:sp>
       <p:sp>
         <p:nvSpPr>
@@ -5546,11 +5555,11 @@
           <a:bodyPr wrap="square" lIns="0" tIns="0" rIns="0" bIns="0" rtlCol="0" anchor="ctr"/>
           <a:lstStyle/>
           <a:p>
-            <a:pPr marL="0" indent="0">
-              <a:buNone/>
-            </a:pPr>
-            <a:r>
-              <a:rPr lang="en-US" sz="1150" b="1" kern="0" spc="150" dirty="0">
+            <a:pPr indent="0" marL="0">
+              <a:buNone/>
+            </a:pPr>
+            <a:r>
+              <a:rPr lang="en-US" sz="1150" b="1" spc="150" kern="0" dirty="0">
                 <a:solidFill>
                   <a:srgbClr val="6EE7A8"/>
                 </a:solidFill>
@@ -5731,13 +5740,6 @@
           </a:solidFill>
           <a:ln/>
         </p:spPr>
-        <p:txBody>
-          <a:bodyPr/>
-          <a:lstStyle/>
-          <a:p>
-            <a:endParaRPr lang="en-US"/>
-          </a:p>
-        </p:txBody>
       </p:sp>
       <p:sp>
         <p:nvSpPr>
@@ -5758,13 +5760,6 @@
           </a:solidFill>
           <a:ln/>
         </p:spPr>
-        <p:txBody>
-          <a:bodyPr/>
-          <a:lstStyle/>
-          <a:p>
-            <a:endParaRPr lang="en-US"/>
-          </a:p>
-        </p:txBody>
       </p:sp>
       <p:sp>
         <p:nvSpPr>
@@ -5787,11 +5782,11 @@
           <a:bodyPr wrap="square" lIns="0" tIns="0" rIns="0" bIns="0" rtlCol="0" anchor="ctr"/>
           <a:lstStyle/>
           <a:p>
-            <a:pPr marL="0" indent="0">
-              <a:buNone/>
-            </a:pPr>
-            <a:r>
-              <a:rPr lang="en-US" sz="1150" b="1" kern="0" spc="150" dirty="0">
+            <a:pPr indent="0" marL="0">
+              <a:buNone/>
+            </a:pPr>
+            <a:r>
+              <a:rPr lang="en-US" sz="1150" b="1" spc="150" kern="0" dirty="0">
                 <a:solidFill>
                   <a:srgbClr val="F5B759"/>
                 </a:solidFill>
@@ -5953,7 +5948,7 @@
           <a:bodyPr wrap="square" lIns="0" tIns="0" rIns="0" bIns="0" rtlCol="0" anchor="ctr"/>
           <a:lstStyle/>
           <a:p>
-            <a:pPr marL="0" indent="0">
+            <a:pPr indent="0" marL="0">
               <a:buNone/>
             </a:pPr>
             <a:r>
@@ -5987,7 +5982,6 @@
         <a:solidFill>
           <a:srgbClr val="0B0E14"/>
         </a:solidFill>
-        <a:effectLst/>
       </p:bgPr>
     </p:bg>
     <p:spTree>
@@ -6023,13 +6017,6 @@
           </a:solidFill>
           <a:ln/>
         </p:spPr>
-        <p:txBody>
-          <a:bodyPr/>
-          <a:lstStyle/>
-          <a:p>
-            <a:endParaRPr lang="en-US"/>
-          </a:p>
-        </p:txBody>
       </p:sp>
       <p:sp>
         <p:nvSpPr>
@@ -6052,7 +6039,7 @@
           <a:bodyPr wrap="square" lIns="0" tIns="0" rIns="0" bIns="0" rtlCol="0" anchor="ctr"/>
           <a:lstStyle/>
           <a:p>
-            <a:pPr marL="0" indent="0">
+            <a:pPr indent="0" marL="0">
               <a:buNone/>
             </a:pPr>
             <a:r>
@@ -6089,13 +6076,6 @@
           </a:solidFill>
           <a:ln/>
         </p:spPr>
-        <p:txBody>
-          <a:bodyPr/>
-          <a:lstStyle/>
-          <a:p>
-            <a:endParaRPr lang="en-US"/>
-          </a:p>
-        </p:txBody>
       </p:sp>
       <p:sp>
         <p:nvSpPr>
@@ -6118,7 +6098,7 @@
           <a:bodyPr wrap="square" lIns="0" tIns="0" rIns="0" bIns="0" rtlCol="0" anchor="ctr"/>
           <a:lstStyle/>
           <a:p>
-            <a:pPr marL="0" indent="0">
+            <a:pPr indent="0" marL="0">
               <a:buNone/>
             </a:pPr>
             <a:r>
@@ -6157,7 +6137,7 @@
           <a:bodyPr wrap="square" lIns="0" tIns="0" rIns="0" bIns="0" rtlCol="0" anchor="ctr"/>
           <a:lstStyle/>
           <a:p>
-            <a:pPr marL="0" indent="0">
+            <a:pPr indent="0" marL="0">
               <a:buNone/>
             </a:pPr>
             <a:r>
@@ -6194,13 +6174,6 @@
           </a:solidFill>
           <a:ln/>
         </p:spPr>
-        <p:txBody>
-          <a:bodyPr/>
-          <a:lstStyle/>
-          <a:p>
-            <a:endParaRPr lang="en-US"/>
-          </a:p>
-        </p:txBody>
       </p:sp>
       <p:sp>
         <p:nvSpPr>
@@ -6223,7 +6196,7 @@
           <a:bodyPr wrap="square" lIns="0" tIns="0" rIns="0" bIns="0" rtlCol="0" anchor="ctr"/>
           <a:lstStyle/>
           <a:p>
-            <a:pPr marL="0" indent="0">
+            <a:pPr indent="0" marL="0">
               <a:buNone/>
             </a:pPr>
             <a:r>
@@ -6262,7 +6235,7 @@
           <a:bodyPr wrap="square" lIns="0" tIns="0" rIns="0" bIns="0" rtlCol="0" anchor="ctr"/>
           <a:lstStyle/>
           <a:p>
-            <a:pPr marL="0" indent="0">
+            <a:pPr indent="0" marL="0">
               <a:buNone/>
             </a:pPr>
             <a:r>
@@ -6299,13 +6272,6 @@
           </a:solidFill>
           <a:ln/>
         </p:spPr>
-        <p:txBody>
-          <a:bodyPr/>
-          <a:lstStyle/>
-          <a:p>
-            <a:endParaRPr lang="en-US"/>
-          </a:p>
-        </p:txBody>
       </p:sp>
       <p:sp>
         <p:nvSpPr>
@@ -6328,7 +6294,7 @@
           <a:bodyPr wrap="square" lIns="0" tIns="0" rIns="0" bIns="0" rtlCol="0" anchor="ctr"/>
           <a:lstStyle/>
           <a:p>
-            <a:pPr marL="0" indent="0">
+            <a:pPr indent="0" marL="0">
               <a:buNone/>
             </a:pPr>
             <a:r>
@@ -6367,7 +6333,7 @@
           <a:bodyPr wrap="square" lIns="0" tIns="0" rIns="0" bIns="0" rtlCol="0" anchor="ctr"/>
           <a:lstStyle/>
           <a:p>
-            <a:pPr marL="0" indent="0">
+            <a:pPr indent="0" marL="0">
               <a:buNone/>
             </a:pPr>
             <a:r>
@@ -6406,11 +6372,11 @@
           <a:bodyPr wrap="square" lIns="0" tIns="0" rIns="0" bIns="0" rtlCol="0" anchor="ctr"/>
           <a:lstStyle/>
           <a:p>
-            <a:pPr marL="0" indent="0">
-              <a:buNone/>
-            </a:pPr>
-            <a:r>
-              <a:rPr lang="en-US" sz="1000" kern="0" spc="100" dirty="0">
+            <a:pPr indent="0" marL="0">
+              <a:buNone/>
+            </a:pPr>
+            <a:r>
+              <a:rPr lang="en-US" sz="1000" spc="100" kern="0" dirty="0">
                 <a:solidFill>
                   <a:srgbClr val="AEBACB"/>
                 </a:solidFill>
@@ -6440,7 +6406,6 @@
         <a:solidFill>
           <a:srgbClr val="0B0E14"/>
         </a:solidFill>
-        <a:effectLst/>
       </p:bgPr>
     </p:bg>
     <p:spTree>
@@ -6476,13 +6441,6 @@
           </a:solidFill>
           <a:ln/>
         </p:spPr>
-        <p:txBody>
-          <a:bodyPr/>
-          <a:lstStyle/>
-          <a:p>
-            <a:endParaRPr lang="en-US"/>
-          </a:p>
-        </p:txBody>
       </p:sp>
       <p:sp>
         <p:nvSpPr>
@@ -6505,11 +6463,11 @@
           <a:bodyPr wrap="square" lIns="0" tIns="0" rIns="0" bIns="0" rtlCol="0" anchor="ctr"/>
           <a:lstStyle/>
           <a:p>
-            <a:pPr marL="0" indent="0">
-              <a:buNone/>
-            </a:pPr>
-            <a:r>
-              <a:rPr lang="en-US" sz="1000" b="1" kern="0" spc="200" dirty="0">
+            <a:pPr indent="0" marL="0">
+              <a:buNone/>
+            </a:pPr>
+            <a:r>
+              <a:rPr lang="en-US" sz="1000" b="1" spc="200" kern="0" dirty="0">
                 <a:solidFill>
                   <a:srgbClr val="6EE7A8"/>
                 </a:solidFill>
@@ -6544,7 +6502,7 @@
           <a:bodyPr wrap="square" lIns="0" tIns="0" rIns="0" bIns="0" rtlCol="0" anchor="t"/>
           <a:lstStyle/>
           <a:p>
-            <a:pPr marL="0" indent="0">
+            <a:pPr indent="0" marL="0">
               <a:buNone/>
             </a:pPr>
             <a:r>
@@ -6583,7 +6541,7 @@
           <a:bodyPr wrap="square" lIns="0" tIns="0" rIns="0" bIns="0" rtlCol="0" anchor="t"/>
           <a:lstStyle/>
           <a:p>
-            <a:pPr marL="0" indent="0">
+            <a:pPr indent="0" marL="0">
               <a:buNone/>
             </a:pPr>
             <a:r>
@@ -6620,13 +6578,6 @@
           </a:solidFill>
           <a:ln/>
         </p:spPr>
-        <p:txBody>
-          <a:bodyPr/>
-          <a:lstStyle/>
-          <a:p>
-            <a:endParaRPr lang="en-US"/>
-          </a:p>
-        </p:txBody>
       </p:sp>
       <p:sp>
         <p:nvSpPr>
@@ -6647,13 +6598,6 @@
           </a:solidFill>
           <a:ln/>
         </p:spPr>
-        <p:txBody>
-          <a:bodyPr/>
-          <a:lstStyle/>
-          <a:p>
-            <a:endParaRPr lang="en-US"/>
-          </a:p>
-        </p:txBody>
       </p:sp>
       <p:sp>
         <p:nvSpPr>
@@ -6676,7 +6620,7 @@
           <a:bodyPr wrap="square" lIns="0" tIns="0" rIns="0" bIns="0" rtlCol="0" anchor="t"/>
           <a:lstStyle/>
           <a:p>
-            <a:pPr marL="0" indent="0">
+            <a:pPr indent="0" marL="0">
               <a:buNone/>
             </a:pPr>
             <a:r>
@@ -6715,7 +6659,7 @@
           <a:bodyPr wrap="square" lIns="0" tIns="0" rIns="0" bIns="0" rtlCol="0" anchor="t"/>
           <a:lstStyle/>
           <a:p>
-            <a:pPr marL="0" indent="0">
+            <a:pPr indent="0" marL="0">
               <a:buNone/>
             </a:pPr>
             <a:r>
@@ -6752,13 +6696,6 @@
           </a:solidFill>
           <a:ln/>
         </p:spPr>
-        <p:txBody>
-          <a:bodyPr/>
-          <a:lstStyle/>
-          <a:p>
-            <a:endParaRPr lang="en-US"/>
-          </a:p>
-        </p:txBody>
       </p:sp>
       <p:sp>
         <p:nvSpPr>
@@ -6779,13 +6716,6 @@
           </a:solidFill>
           <a:ln/>
         </p:spPr>
-        <p:txBody>
-          <a:bodyPr/>
-          <a:lstStyle/>
-          <a:p>
-            <a:endParaRPr lang="en-US"/>
-          </a:p>
-        </p:txBody>
       </p:sp>
       <p:sp>
         <p:nvSpPr>
@@ -6808,7 +6738,7 @@
           <a:bodyPr wrap="square" lIns="0" tIns="0" rIns="0" bIns="0" rtlCol="0" anchor="t"/>
           <a:lstStyle/>
           <a:p>
-            <a:pPr marL="0" indent="0">
+            <a:pPr indent="0" marL="0">
               <a:buNone/>
             </a:pPr>
             <a:r>
@@ -6847,7 +6777,7 @@
           <a:bodyPr wrap="square" lIns="0" tIns="0" rIns="0" bIns="0" rtlCol="0" anchor="t"/>
           <a:lstStyle/>
           <a:p>
-            <a:pPr marL="0" indent="0">
+            <a:pPr indent="0" marL="0">
               <a:buNone/>
             </a:pPr>
             <a:r>
@@ -6884,13 +6814,6 @@
           </a:solidFill>
           <a:ln/>
         </p:spPr>
-        <p:txBody>
-          <a:bodyPr/>
-          <a:lstStyle/>
-          <a:p>
-            <a:endParaRPr lang="en-US"/>
-          </a:p>
-        </p:txBody>
       </p:sp>
       <p:sp>
         <p:nvSpPr>
@@ -6911,13 +6834,6 @@
           </a:solidFill>
           <a:ln/>
         </p:spPr>
-        <p:txBody>
-          <a:bodyPr/>
-          <a:lstStyle/>
-          <a:p>
-            <a:endParaRPr lang="en-US"/>
-          </a:p>
-        </p:txBody>
       </p:sp>
       <p:sp>
         <p:nvSpPr>
@@ -6940,7 +6856,7 @@
           <a:bodyPr wrap="square" lIns="0" tIns="0" rIns="0" bIns="0" rtlCol="0" anchor="t"/>
           <a:lstStyle/>
           <a:p>
-            <a:pPr marL="0" indent="0">
+            <a:pPr indent="0" marL="0">
               <a:buNone/>
             </a:pPr>
             <a:r>
@@ -6979,7 +6895,7 @@
           <a:bodyPr wrap="square" lIns="0" tIns="0" rIns="0" bIns="0" rtlCol="0" anchor="t"/>
           <a:lstStyle/>
           <a:p>
-            <a:pPr marL="0" indent="0">
+            <a:pPr indent="0" marL="0">
               <a:buNone/>
             </a:pPr>
             <a:r>
@@ -7018,7 +6934,7 @@
           <a:bodyPr wrap="square" lIns="0" tIns="0" rIns="0" bIns="0" rtlCol="0" anchor="ctr"/>
           <a:lstStyle/>
           <a:p>
-            <a:pPr marL="0" indent="0">
+            <a:pPr indent="0" marL="0">
               <a:buNone/>
             </a:pPr>
             <a:r>
@@ -7052,7 +6968,6 @@
         <a:solidFill>
           <a:srgbClr val="0B0E14"/>
         </a:solidFill>
-        <a:effectLst/>
       </p:bgPr>
     </p:bg>
     <p:spTree>
@@ -7088,13 +7003,6 @@
           </a:solidFill>
           <a:ln/>
         </p:spPr>
-        <p:txBody>
-          <a:bodyPr/>
-          <a:lstStyle/>
-          <a:p>
-            <a:endParaRPr lang="en-US"/>
-          </a:p>
-        </p:txBody>
       </p:sp>
       <p:sp>
         <p:nvSpPr>
@@ -7117,11 +7025,11 @@
           <a:bodyPr wrap="square" lIns="0" tIns="0" rIns="0" bIns="0" rtlCol="0" anchor="ctr"/>
           <a:lstStyle/>
           <a:p>
-            <a:pPr marL="0" indent="0">
-              <a:buNone/>
-            </a:pPr>
-            <a:r>
-              <a:rPr lang="en-US" sz="1000" b="1" kern="0" spc="200" dirty="0">
+            <a:pPr indent="0" marL="0">
+              <a:buNone/>
+            </a:pPr>
+            <a:r>
+              <a:rPr lang="en-US" sz="1000" b="1" spc="200" kern="0" dirty="0">
                 <a:solidFill>
                   <a:srgbClr val="6EE7A8"/>
                 </a:solidFill>
@@ -7156,7 +7064,7 @@
           <a:bodyPr wrap="square" lIns="0" tIns="0" rIns="0" bIns="0" rtlCol="0" anchor="t"/>
           <a:lstStyle/>
           <a:p>
-            <a:pPr marL="0" indent="0">
+            <a:pPr indent="0" marL="0">
               <a:buNone/>
             </a:pPr>
             <a:r>
@@ -7195,7 +7103,7 @@
           <a:bodyPr wrap="square" lIns="0" tIns="0" rIns="0" bIns="0" rtlCol="0" anchor="t"/>
           <a:lstStyle/>
           <a:p>
-            <a:pPr marL="0" indent="0">
+            <a:pPr indent="0" marL="0">
               <a:buNone/>
             </a:pPr>
             <a:r>
@@ -7215,14 +7123,14 @@
       </p:sp>
       <p:pic>
         <p:nvPicPr>
-          <p:cNvPr id="6" name="Image 0" descr="/Users/parthpatel/Projects/personal/sentinel-hackathon/docs/images/05-find-a-vehicle.png"/>
+          <p:cNvPr id="6" name="Image 0" descr="/Users/parthpatel/Projects/personal/sentinel-hackathon/docs/images/05-find-a-vehicle.png">    </p:cNvPr>
           <p:cNvPicPr>
             <a:picLocks noChangeAspect="1"/>
           </p:cNvPicPr>
           <p:nvPr/>
         </p:nvPicPr>
         <p:blipFill>
-          <a:blip r:embed="rId3"/>
+          <a:blip r:embed="rId1"/>
           <a:stretch>
             <a:fillRect/>
           </a:stretch>
@@ -7364,7 +7272,7 @@
           <a:bodyPr wrap="square" lIns="0" tIns="0" rIns="0" bIns="0" rtlCol="0" anchor="ctr"/>
           <a:lstStyle/>
           <a:p>
-            <a:pPr marL="0" indent="0">
+            <a:pPr indent="0" marL="0">
               <a:buNone/>
             </a:pPr>
             <a:r>
@@ -7398,7 +7306,6 @@
         <a:solidFill>
           <a:srgbClr val="0B0E14"/>
         </a:solidFill>
-        <a:effectLst/>
       </p:bgPr>
     </p:bg>
     <p:spTree>
@@ -7434,13 +7341,6 @@
           </a:solidFill>
           <a:ln/>
         </p:spPr>
-        <p:txBody>
-          <a:bodyPr/>
-          <a:lstStyle/>
-          <a:p>
-            <a:endParaRPr lang="en-US"/>
-          </a:p>
-        </p:txBody>
       </p:sp>
       <p:sp>
         <p:nvSpPr>
@@ -7463,11 +7363,11 @@
           <a:bodyPr wrap="square" lIns="0" tIns="0" rIns="0" bIns="0" rtlCol="0" anchor="ctr"/>
           <a:lstStyle/>
           <a:p>
-            <a:pPr marL="0" indent="0">
-              <a:buNone/>
-            </a:pPr>
-            <a:r>
-              <a:rPr lang="en-US" sz="1000" b="1" kern="0" spc="200" dirty="0">
+            <a:pPr indent="0" marL="0">
+              <a:buNone/>
+            </a:pPr>
+            <a:r>
+              <a:rPr lang="en-US" sz="1000" b="1" spc="200" kern="0" dirty="0">
                 <a:solidFill>
                   <a:srgbClr val="6EE7A8"/>
                 </a:solidFill>
@@ -7502,7 +7402,7 @@
           <a:bodyPr wrap="square" lIns="0" tIns="0" rIns="0" bIns="0" rtlCol="0" anchor="t"/>
           <a:lstStyle/>
           <a:p>
-            <a:pPr marL="0" indent="0">
+            <a:pPr indent="0" marL="0">
               <a:buNone/>
             </a:pPr>
             <a:r>
@@ -7541,7 +7441,7 @@
           <a:bodyPr wrap="square" lIns="0" tIns="0" rIns="0" bIns="0" rtlCol="0" anchor="t"/>
           <a:lstStyle/>
           <a:p>
-            <a:pPr marL="0" indent="0">
+            <a:pPr indent="0" marL="0">
               <a:buNone/>
             </a:pPr>
             <a:r>
@@ -7578,13 +7478,6 @@
           </a:solidFill>
           <a:ln/>
         </p:spPr>
-        <p:txBody>
-          <a:bodyPr/>
-          <a:lstStyle/>
-          <a:p>
-            <a:endParaRPr lang="en-US"/>
-          </a:p>
-        </p:txBody>
       </p:sp>
       <p:sp>
         <p:nvSpPr>
@@ -7605,13 +7498,6 @@
           </a:solidFill>
           <a:ln/>
         </p:spPr>
-        <p:txBody>
-          <a:bodyPr/>
-          <a:lstStyle/>
-          <a:p>
-            <a:endParaRPr lang="en-US"/>
-          </a:p>
-        </p:txBody>
       </p:sp>
       <p:sp>
         <p:nvSpPr>
@@ -7634,7 +7520,7 @@
           <a:bodyPr wrap="square" lIns="0" tIns="0" rIns="0" bIns="0" rtlCol="0" anchor="ctr"/>
           <a:lstStyle/>
           <a:p>
-            <a:pPr marL="0" indent="0">
+            <a:pPr indent="0" marL="0">
               <a:buNone/>
             </a:pPr>
             <a:r>
@@ -7673,7 +7559,7 @@
           <a:bodyPr wrap="square" lIns="0" tIns="0" rIns="0" bIns="0" rtlCol="0" anchor="ctr"/>
           <a:lstStyle/>
           <a:p>
-            <a:pPr marL="0" indent="0">
+            <a:pPr indent="0" marL="0">
               <a:buNone/>
             </a:pPr>
             <a:r>
@@ -7712,7 +7598,7 @@
           <a:bodyPr wrap="square" lIns="0" tIns="0" rIns="0" bIns="0" rtlCol="0" anchor="ctr"/>
           <a:lstStyle/>
           <a:p>
-            <a:pPr marL="0" indent="0">
+            <a:pPr indent="0" marL="0">
               <a:buNone/>
             </a:pPr>
             <a:r>
@@ -7749,13 +7635,6 @@
           </a:solidFill>
           <a:ln/>
         </p:spPr>
-        <p:txBody>
-          <a:bodyPr/>
-          <a:lstStyle/>
-          <a:p>
-            <a:endParaRPr lang="en-US"/>
-          </a:p>
-        </p:txBody>
       </p:sp>
       <p:sp>
         <p:nvSpPr>
@@ -7776,13 +7655,6 @@
           </a:solidFill>
           <a:ln/>
         </p:spPr>
-        <p:txBody>
-          <a:bodyPr/>
-          <a:lstStyle/>
-          <a:p>
-            <a:endParaRPr lang="en-US"/>
-          </a:p>
-        </p:txBody>
       </p:sp>
       <p:sp>
         <p:nvSpPr>
@@ -7805,7 +7677,7 @@
           <a:bodyPr wrap="square" lIns="0" tIns="0" rIns="0" bIns="0" rtlCol="0" anchor="ctr"/>
           <a:lstStyle/>
           <a:p>
-            <a:pPr marL="0" indent="0">
+            <a:pPr indent="0" marL="0">
               <a:buNone/>
             </a:pPr>
             <a:r>
@@ -7844,7 +7716,7 @@
           <a:bodyPr wrap="square" lIns="0" tIns="0" rIns="0" bIns="0" rtlCol="0" anchor="ctr"/>
           <a:lstStyle/>
           <a:p>
-            <a:pPr marL="0" indent="0">
+            <a:pPr indent="0" marL="0">
               <a:buNone/>
             </a:pPr>
             <a:r>
@@ -7883,7 +7755,7 @@
           <a:bodyPr wrap="square" lIns="0" tIns="0" rIns="0" bIns="0" rtlCol="0" anchor="ctr"/>
           <a:lstStyle/>
           <a:p>
-            <a:pPr marL="0" indent="0">
+            <a:pPr indent="0" marL="0">
               <a:buNone/>
             </a:pPr>
             <a:r>
@@ -7920,13 +7792,6 @@
           </a:solidFill>
           <a:ln/>
         </p:spPr>
-        <p:txBody>
-          <a:bodyPr/>
-          <a:lstStyle/>
-          <a:p>
-            <a:endParaRPr lang="en-US"/>
-          </a:p>
-        </p:txBody>
       </p:sp>
       <p:sp>
         <p:nvSpPr>
@@ -7947,13 +7812,6 @@
           </a:solidFill>
           <a:ln/>
         </p:spPr>
-        <p:txBody>
-          <a:bodyPr/>
-          <a:lstStyle/>
-          <a:p>
-            <a:endParaRPr lang="en-US"/>
-          </a:p>
-        </p:txBody>
       </p:sp>
       <p:sp>
         <p:nvSpPr>
@@ -7976,7 +7834,7 @@
           <a:bodyPr wrap="square" lIns="0" tIns="0" rIns="0" bIns="0" rtlCol="0" anchor="ctr"/>
           <a:lstStyle/>
           <a:p>
-            <a:pPr marL="0" indent="0">
+            <a:pPr indent="0" marL="0">
               <a:buNone/>
             </a:pPr>
             <a:r>
@@ -8015,7 +7873,7 @@
           <a:bodyPr wrap="square" lIns="0" tIns="0" rIns="0" bIns="0" rtlCol="0" anchor="ctr"/>
           <a:lstStyle/>
           <a:p>
-            <a:pPr marL="0" indent="0">
+            <a:pPr indent="0" marL="0">
               <a:buNone/>
             </a:pPr>
             <a:r>
@@ -8054,7 +7912,7 @@
           <a:bodyPr wrap="square" lIns="0" tIns="0" rIns="0" bIns="0" rtlCol="0" anchor="ctr"/>
           <a:lstStyle/>
           <a:p>
-            <a:pPr marL="0" indent="0">
+            <a:pPr indent="0" marL="0">
               <a:buNone/>
             </a:pPr>
             <a:r>
@@ -8091,13 +7949,6 @@
           </a:solidFill>
           <a:ln/>
         </p:spPr>
-        <p:txBody>
-          <a:bodyPr/>
-          <a:lstStyle/>
-          <a:p>
-            <a:endParaRPr lang="en-US"/>
-          </a:p>
-        </p:txBody>
       </p:sp>
       <p:sp>
         <p:nvSpPr>
@@ -8118,13 +7969,6 @@
           </a:solidFill>
           <a:ln/>
         </p:spPr>
-        <p:txBody>
-          <a:bodyPr/>
-          <a:lstStyle/>
-          <a:p>
-            <a:endParaRPr lang="en-US"/>
-          </a:p>
-        </p:txBody>
       </p:sp>
       <p:sp>
         <p:nvSpPr>
@@ -8147,7 +7991,7 @@
           <a:bodyPr wrap="square" lIns="0" tIns="0" rIns="0" bIns="0" rtlCol="0" anchor="ctr"/>
           <a:lstStyle/>
           <a:p>
-            <a:pPr marL="0" indent="0">
+            <a:pPr indent="0" marL="0">
               <a:buNone/>
             </a:pPr>
             <a:r>
@@ -8186,7 +8030,7 @@
           <a:bodyPr wrap="square" lIns="0" tIns="0" rIns="0" bIns="0" rtlCol="0" anchor="ctr"/>
           <a:lstStyle/>
           <a:p>
-            <a:pPr marL="0" indent="0">
+            <a:pPr indent="0" marL="0">
               <a:buNone/>
             </a:pPr>
             <a:r>
@@ -8225,7 +8069,7 @@
           <a:bodyPr wrap="square" lIns="0" tIns="0" rIns="0" bIns="0" rtlCol="0" anchor="ctr"/>
           <a:lstStyle/>
           <a:p>
-            <a:pPr marL="0" indent="0">
+            <a:pPr indent="0" marL="0">
               <a:buNone/>
             </a:pPr>
             <a:r>
@@ -8237,7 +8081,7 @@
                 <a:ea typeface="Arial" pitchFamily="34" charset="-122"/>
                 <a:cs typeface="Arial" pitchFamily="34" charset="-120"/>
               </a:rPr>
-              <a:t>Only on demand, only for the cameras being watched.</a:t>
+              <a:t>Only on demand, only for the cameras actually being watched.</a:t>
             </a:r>
             <a:endParaRPr lang="en-US" sz="1150" dirty="0"/>
           </a:p>
@@ -8259,7 +8103,6 @@
         <a:solidFill>
           <a:srgbClr val="0B0E14"/>
         </a:solidFill>
-        <a:effectLst/>
       </p:bgPr>
     </p:bg>
     <p:spTree>
@@ -8295,13 +8138,6 @@
           </a:solidFill>
           <a:ln/>
         </p:spPr>
-        <p:txBody>
-          <a:bodyPr/>
-          <a:lstStyle/>
-          <a:p>
-            <a:endParaRPr lang="en-US"/>
-          </a:p>
-        </p:txBody>
       </p:sp>
       <p:sp>
         <p:nvSpPr>
@@ -8324,11 +8160,11 @@
           <a:bodyPr wrap="square" lIns="0" tIns="0" rIns="0" bIns="0" rtlCol="0" anchor="ctr"/>
           <a:lstStyle/>
           <a:p>
-            <a:pPr marL="0" indent="0">
-              <a:buNone/>
-            </a:pPr>
-            <a:r>
-              <a:rPr lang="en-US" sz="1000" b="1" kern="0" spc="200" dirty="0">
+            <a:pPr indent="0" marL="0">
+              <a:buNone/>
+            </a:pPr>
+            <a:r>
+              <a:rPr lang="en-US" sz="1000" b="1" spc="200" kern="0" dirty="0">
                 <a:solidFill>
                   <a:srgbClr val="F87171"/>
                 </a:solidFill>
@@ -8363,7 +8199,7 @@
           <a:bodyPr wrap="square" lIns="0" tIns="0" rIns="0" bIns="0" rtlCol="0" anchor="t"/>
           <a:lstStyle/>
           <a:p>
-            <a:pPr marL="0" indent="0">
+            <a:pPr indent="0" marL="0">
               <a:buNone/>
             </a:pPr>
             <a:r>
@@ -8402,7 +8238,7 @@
           <a:bodyPr wrap="square" lIns="0" tIns="0" rIns="0" bIns="0" rtlCol="0" anchor="t"/>
           <a:lstStyle/>
           <a:p>
-            <a:pPr marL="0" indent="0">
+            <a:pPr indent="0" marL="0">
               <a:buNone/>
             </a:pPr>
             <a:r>
@@ -8439,13 +8275,6 @@
           </a:solidFill>
           <a:ln/>
         </p:spPr>
-        <p:txBody>
-          <a:bodyPr/>
-          <a:lstStyle/>
-          <a:p>
-            <a:endParaRPr lang="en-US"/>
-          </a:p>
-        </p:txBody>
       </p:sp>
       <p:sp>
         <p:nvSpPr>
@@ -8466,13 +8295,6 @@
           </a:solidFill>
           <a:ln/>
         </p:spPr>
-        <p:txBody>
-          <a:bodyPr/>
-          <a:lstStyle/>
-          <a:p>
-            <a:endParaRPr lang="en-US"/>
-          </a:p>
-        </p:txBody>
       </p:sp>
       <p:sp>
         <p:nvSpPr>
@@ -8495,7 +8317,7 @@
           <a:bodyPr wrap="square" lIns="0" tIns="0" rIns="0" bIns="0" rtlCol="0" anchor="t"/>
           <a:lstStyle/>
           <a:p>
-            <a:pPr marL="0" indent="0">
+            <a:pPr indent="0" marL="0">
               <a:buNone/>
             </a:pPr>
             <a:r>
@@ -8534,7 +8356,7 @@
           <a:bodyPr wrap="square" lIns="0" tIns="0" rIns="0" bIns="0" rtlCol="0" anchor="t"/>
           <a:lstStyle/>
           <a:p>
-            <a:pPr marL="0" indent="0">
+            <a:pPr indent="0" marL="0">
               <a:buNone/>
             </a:pPr>
             <a:r>
@@ -8571,13 +8393,6 @@
           </a:solidFill>
           <a:ln/>
         </p:spPr>
-        <p:txBody>
-          <a:bodyPr/>
-          <a:lstStyle/>
-          <a:p>
-            <a:endParaRPr lang="en-US"/>
-          </a:p>
-        </p:txBody>
       </p:sp>
       <p:sp>
         <p:nvSpPr>
@@ -8598,13 +8413,6 @@
           </a:solidFill>
           <a:ln/>
         </p:spPr>
-        <p:txBody>
-          <a:bodyPr/>
-          <a:lstStyle/>
-          <a:p>
-            <a:endParaRPr lang="en-US"/>
-          </a:p>
-        </p:txBody>
       </p:sp>
       <p:sp>
         <p:nvSpPr>
@@ -8627,7 +8435,7 @@
           <a:bodyPr wrap="square" lIns="0" tIns="0" rIns="0" bIns="0" rtlCol="0" anchor="t"/>
           <a:lstStyle/>
           <a:p>
-            <a:pPr marL="0" indent="0">
+            <a:pPr indent="0" marL="0">
               <a:buNone/>
             </a:pPr>
             <a:r>
@@ -8666,7 +8474,7 @@
           <a:bodyPr wrap="square" lIns="0" tIns="0" rIns="0" bIns="0" rtlCol="0" anchor="t"/>
           <a:lstStyle/>
           <a:p>
-            <a:pPr marL="0" indent="0">
+            <a:pPr indent="0" marL="0">
               <a:buNone/>
             </a:pPr>
             <a:r>
@@ -8703,13 +8511,6 @@
           </a:solidFill>
           <a:ln/>
         </p:spPr>
-        <p:txBody>
-          <a:bodyPr/>
-          <a:lstStyle/>
-          <a:p>
-            <a:endParaRPr lang="en-US"/>
-          </a:p>
-        </p:txBody>
       </p:sp>
       <p:sp>
         <p:nvSpPr>
@@ -8730,13 +8531,6 @@
           </a:solidFill>
           <a:ln/>
         </p:spPr>
-        <p:txBody>
-          <a:bodyPr/>
-          <a:lstStyle/>
-          <a:p>
-            <a:endParaRPr lang="en-US"/>
-          </a:p>
-        </p:txBody>
       </p:sp>
       <p:sp>
         <p:nvSpPr>
@@ -8759,7 +8553,7 @@
           <a:bodyPr wrap="square" lIns="0" tIns="0" rIns="0" bIns="0" rtlCol="0" anchor="t"/>
           <a:lstStyle/>
           <a:p>
-            <a:pPr marL="0" indent="0">
+            <a:pPr indent="0" marL="0">
               <a:buNone/>
             </a:pPr>
             <a:r>
@@ -8798,7 +8592,7 @@
           <a:bodyPr wrap="square" lIns="0" tIns="0" rIns="0" bIns="0" rtlCol="0" anchor="t"/>
           <a:lstStyle/>
           <a:p>
-            <a:pPr marL="0" indent="0">
+            <a:pPr indent="0" marL="0">
               <a:buNone/>
             </a:pPr>
             <a:r>
@@ -8837,7 +8631,7 @@
           <a:bodyPr wrap="square" lIns="0" tIns="0" rIns="0" bIns="0" rtlCol="0" anchor="ctr"/>
           <a:lstStyle/>
           <a:p>
-            <a:pPr marL="0" indent="0">
+            <a:pPr indent="0" marL="0">
               <a:buNone/>
             </a:pPr>
             <a:r>
@@ -8871,7 +8665,6 @@
         <a:solidFill>
           <a:srgbClr val="0B0E14"/>
         </a:solidFill>
-        <a:effectLst/>
       </p:bgPr>
     </p:bg>
     <p:spTree>
@@ -8907,13 +8700,6 @@
           </a:solidFill>
           <a:ln/>
         </p:spPr>
-        <p:txBody>
-          <a:bodyPr/>
-          <a:lstStyle/>
-          <a:p>
-            <a:endParaRPr lang="en-US"/>
-          </a:p>
-        </p:txBody>
       </p:sp>
       <p:sp>
         <p:nvSpPr>
@@ -8936,11 +8722,11 @@
           <a:bodyPr wrap="square" lIns="0" tIns="0" rIns="0" bIns="0" rtlCol="0" anchor="ctr"/>
           <a:lstStyle/>
           <a:p>
-            <a:pPr marL="0" indent="0">
-              <a:buNone/>
-            </a:pPr>
-            <a:r>
-              <a:rPr lang="en-US" sz="1000" b="1" kern="0" spc="200" dirty="0">
+            <a:pPr indent="0" marL="0">
+              <a:buNone/>
+            </a:pPr>
+            <a:r>
+              <a:rPr lang="en-US" sz="1000" b="1" spc="200" kern="0" dirty="0">
                 <a:solidFill>
                   <a:srgbClr val="6EE7A8"/>
                 </a:solidFill>
@@ -8975,7 +8761,7 @@
           <a:bodyPr wrap="square" lIns="0" tIns="0" rIns="0" bIns="0" rtlCol="0" anchor="t"/>
           <a:lstStyle/>
           <a:p>
-            <a:pPr marL="0" indent="0">
+            <a:pPr indent="0" marL="0">
               <a:buNone/>
             </a:pPr>
             <a:r>
@@ -9014,7 +8800,7 @@
           <a:bodyPr wrap="square" lIns="0" tIns="0" rIns="0" bIns="0" rtlCol="0" anchor="t"/>
           <a:lstStyle/>
           <a:p>
-            <a:pPr marL="0" indent="0">
+            <a:pPr indent="0" marL="0">
               <a:buNone/>
             </a:pPr>
             <a:r>
@@ -9051,13 +8837,6 @@
           </a:solidFill>
           <a:ln/>
         </p:spPr>
-        <p:txBody>
-          <a:bodyPr/>
-          <a:lstStyle/>
-          <a:p>
-            <a:endParaRPr lang="en-US"/>
-          </a:p>
-        </p:txBody>
       </p:sp>
       <p:sp>
         <p:nvSpPr>
@@ -9078,13 +8857,6 @@
           </a:solidFill>
           <a:ln/>
         </p:spPr>
-        <p:txBody>
-          <a:bodyPr/>
-          <a:lstStyle/>
-          <a:p>
-            <a:endParaRPr lang="en-US"/>
-          </a:p>
-        </p:txBody>
       </p:sp>
       <p:sp>
         <p:nvSpPr>
@@ -9107,11 +8879,11 @@
           <a:bodyPr wrap="square" lIns="0" tIns="0" rIns="0" bIns="0" rtlCol="0" anchor="ctr"/>
           <a:lstStyle/>
           <a:p>
-            <a:pPr marL="0" indent="0">
-              <a:buNone/>
-            </a:pPr>
-            <a:r>
-              <a:rPr lang="en-US" sz="1300" b="1" kern="0" spc="150" dirty="0">
+            <a:pPr indent="0" marL="0">
+              <a:buNone/>
+            </a:pPr>
+            <a:r>
+              <a:rPr lang="en-US" sz="1300" b="1" spc="150" kern="0" dirty="0">
                 <a:solidFill>
                   <a:srgbClr val="6EE7A8"/>
                 </a:solidFill>
@@ -9146,7 +8918,7 @@
           <a:bodyPr wrap="square" lIns="0" tIns="0" rIns="0" bIns="0" rtlCol="0" anchor="t"/>
           <a:lstStyle/>
           <a:p>
-            <a:pPr marL="0" indent="0">
+            <a:pPr indent="0" marL="0">
               <a:buNone/>
             </a:pPr>
             <a:r>
@@ -9185,7 +8957,7 @@
           <a:bodyPr wrap="square" lIns="0" tIns="0" rIns="0" bIns="0" rtlCol="0" anchor="t"/>
           <a:lstStyle/>
           <a:p>
-            <a:pPr marL="0" indent="0">
+            <a:pPr indent="0" marL="0">
               <a:buNone/>
             </a:pPr>
             <a:r>
@@ -9222,13 +8994,6 @@
           </a:solidFill>
           <a:ln/>
         </p:spPr>
-        <p:txBody>
-          <a:bodyPr/>
-          <a:lstStyle/>
-          <a:p>
-            <a:endParaRPr lang="en-US"/>
-          </a:p>
-        </p:txBody>
       </p:sp>
       <p:sp>
         <p:nvSpPr>
@@ -9249,13 +9014,6 @@
           </a:solidFill>
           <a:ln/>
         </p:spPr>
-        <p:txBody>
-          <a:bodyPr/>
-          <a:lstStyle/>
-          <a:p>
-            <a:endParaRPr lang="en-US"/>
-          </a:p>
-        </p:txBody>
       </p:sp>
       <p:sp>
         <p:nvSpPr>
@@ -9278,11 +9036,11 @@
           <a:bodyPr wrap="square" lIns="0" tIns="0" rIns="0" bIns="0" rtlCol="0" anchor="ctr"/>
           <a:lstStyle/>
           <a:p>
-            <a:pPr marL="0" indent="0">
-              <a:buNone/>
-            </a:pPr>
-            <a:r>
-              <a:rPr lang="en-US" sz="1300" b="1" kern="0" spc="150" dirty="0">
+            <a:pPr indent="0" marL="0">
+              <a:buNone/>
+            </a:pPr>
+            <a:r>
+              <a:rPr lang="en-US" sz="1300" b="1" spc="150" kern="0" dirty="0">
                 <a:solidFill>
                   <a:srgbClr val="5EEAD4"/>
                 </a:solidFill>
@@ -9317,7 +9075,7 @@
           <a:bodyPr wrap="square" lIns="0" tIns="0" rIns="0" bIns="0" rtlCol="0" anchor="t"/>
           <a:lstStyle/>
           <a:p>
-            <a:pPr marL="0" indent="0">
+            <a:pPr indent="0" marL="0">
               <a:buNone/>
             </a:pPr>
             <a:r>
@@ -9356,7 +9114,7 @@
           <a:bodyPr wrap="square" lIns="0" tIns="0" rIns="0" bIns="0" rtlCol="0" anchor="t"/>
           <a:lstStyle/>
           <a:p>
-            <a:pPr marL="0" indent="0">
+            <a:pPr indent="0" marL="0">
               <a:buNone/>
             </a:pPr>
             <a:r>
@@ -9393,13 +9151,6 @@
           </a:solidFill>
           <a:ln/>
         </p:spPr>
-        <p:txBody>
-          <a:bodyPr/>
-          <a:lstStyle/>
-          <a:p>
-            <a:endParaRPr lang="en-US"/>
-          </a:p>
-        </p:txBody>
       </p:sp>
       <p:sp>
         <p:nvSpPr>
@@ -9420,13 +9171,6 @@
           </a:solidFill>
           <a:ln/>
         </p:spPr>
-        <p:txBody>
-          <a:bodyPr/>
-          <a:lstStyle/>
-          <a:p>
-            <a:endParaRPr lang="en-US"/>
-          </a:p>
-        </p:txBody>
       </p:sp>
       <p:sp>
         <p:nvSpPr>
@@ -9449,11 +9193,11 @@
           <a:bodyPr wrap="square" lIns="0" tIns="0" rIns="0" bIns="0" rtlCol="0" anchor="ctr"/>
           <a:lstStyle/>
           <a:p>
-            <a:pPr marL="0" indent="0">
-              <a:buNone/>
-            </a:pPr>
-            <a:r>
-              <a:rPr lang="en-US" sz="1300" b="1" kern="0" spc="150" dirty="0">
+            <a:pPr indent="0" marL="0">
+              <a:buNone/>
+            </a:pPr>
+            <a:r>
+              <a:rPr lang="en-US" sz="1300" b="1" spc="150" kern="0" dirty="0">
                 <a:solidFill>
                   <a:srgbClr val="F5B759"/>
                 </a:solidFill>
@@ -9488,7 +9232,7 @@
           <a:bodyPr wrap="square" lIns="0" tIns="0" rIns="0" bIns="0" rtlCol="0" anchor="t"/>
           <a:lstStyle/>
           <a:p>
-            <a:pPr marL="0" indent="0">
+            <a:pPr indent="0" marL="0">
               <a:buNone/>
             </a:pPr>
             <a:r>
@@ -9527,7 +9271,7 @@
           <a:bodyPr wrap="square" lIns="0" tIns="0" rIns="0" bIns="0" rtlCol="0" anchor="t"/>
           <a:lstStyle/>
           <a:p>
-            <a:pPr marL="0" indent="0">
+            <a:pPr indent="0" marL="0">
               <a:buNone/>
             </a:pPr>
             <a:r>
@@ -9566,7 +9310,7 @@
           <a:bodyPr wrap="square" lIns="0" tIns="0" rIns="0" bIns="0" rtlCol="0" anchor="ctr"/>
           <a:lstStyle/>
           <a:p>
-            <a:pPr marL="0" indent="0">
+            <a:pPr indent="0" marL="0">
               <a:buNone/>
             </a:pPr>
             <a:r>
@@ -9600,7 +9344,6 @@
         <a:solidFill>
           <a:srgbClr val="0B0E14"/>
         </a:solidFill>
-        <a:effectLst/>
       </p:bgPr>
     </p:bg>
     <p:spTree>
@@ -9636,13 +9379,6 @@
           </a:solidFill>
           <a:ln/>
         </p:spPr>
-        <p:txBody>
-          <a:bodyPr/>
-          <a:lstStyle/>
-          <a:p>
-            <a:endParaRPr lang="en-US"/>
-          </a:p>
-        </p:txBody>
       </p:sp>
       <p:sp>
         <p:nvSpPr>
@@ -9665,11 +9401,11 @@
           <a:bodyPr wrap="square" lIns="0" tIns="0" rIns="0" bIns="0" rtlCol="0" anchor="ctr"/>
           <a:lstStyle/>
           <a:p>
-            <a:pPr marL="0" indent="0">
-              <a:buNone/>
-            </a:pPr>
-            <a:r>
-              <a:rPr lang="en-US" sz="1000" b="1" kern="0" spc="200" dirty="0">
+            <a:pPr indent="0" marL="0">
+              <a:buNone/>
+            </a:pPr>
+            <a:r>
+              <a:rPr lang="en-US" sz="1000" b="1" spc="200" kern="0" dirty="0">
                 <a:solidFill>
                   <a:srgbClr val="6EE7A8"/>
                 </a:solidFill>
@@ -9704,7 +9440,7 @@
           <a:bodyPr wrap="square" lIns="0" tIns="0" rIns="0" bIns="0" rtlCol="0" anchor="t"/>
           <a:lstStyle/>
           <a:p>
-            <a:pPr marL="0" indent="0">
+            <a:pPr indent="0" marL="0">
               <a:buNone/>
             </a:pPr>
             <a:r>
@@ -9743,7 +9479,7 @@
           <a:bodyPr wrap="square" lIns="0" tIns="0" rIns="0" bIns="0" rtlCol="0" anchor="t"/>
           <a:lstStyle/>
           <a:p>
-            <a:pPr marL="0" indent="0">
+            <a:pPr indent="0" marL="0">
               <a:buNone/>
             </a:pPr>
             <a:r>
@@ -9780,13 +9516,6 @@
           </a:solidFill>
           <a:ln/>
         </p:spPr>
-        <p:txBody>
-          <a:bodyPr/>
-          <a:lstStyle/>
-          <a:p>
-            <a:endParaRPr lang="en-US"/>
-          </a:p>
-        </p:txBody>
       </p:sp>
       <p:sp>
         <p:nvSpPr>
@@ -9807,13 +9536,6 @@
           </a:solidFill>
           <a:ln/>
         </p:spPr>
-        <p:txBody>
-          <a:bodyPr/>
-          <a:lstStyle/>
-          <a:p>
-            <a:endParaRPr lang="en-US"/>
-          </a:p>
-        </p:txBody>
       </p:sp>
       <p:sp>
         <p:nvSpPr>
@@ -9836,7 +9558,7 @@
           <a:bodyPr wrap="square" lIns="0" tIns="0" rIns="0" bIns="0" rtlCol="0" anchor="t"/>
           <a:lstStyle/>
           <a:p>
-            <a:pPr marL="0" indent="0">
+            <a:pPr indent="0" marL="0">
               <a:buNone/>
             </a:pPr>
             <a:r>
@@ -9875,7 +9597,7 @@
           <a:bodyPr wrap="square" lIns="0" tIns="0" rIns="0" bIns="0" rtlCol="0" anchor="t"/>
           <a:lstStyle/>
           <a:p>
-            <a:pPr marL="0" indent="0">
+            <a:pPr indent="0" marL="0">
               <a:buNone/>
             </a:pPr>
             <a:r>
@@ -9914,7 +9636,7 @@
           <a:bodyPr wrap="square" lIns="0" tIns="0" rIns="0" bIns="0" rtlCol="0" anchor="ctr"/>
           <a:lstStyle/>
           <a:p>
-            <a:pPr marL="0" indent="0">
+            <a:pPr indent="0" marL="0">
               <a:buNone/>
             </a:pPr>
             <a:r>
@@ -10054,7 +9776,6 @@
         <a:solidFill>
           <a:srgbClr val="0B0E14"/>
         </a:solidFill>
-        <a:effectLst/>
       </p:bgPr>
     </p:bg>
     <p:spTree>
@@ -10090,13 +9811,6 @@
           </a:solidFill>
           <a:ln/>
         </p:spPr>
-        <p:txBody>
-          <a:bodyPr/>
-          <a:lstStyle/>
-          <a:p>
-            <a:endParaRPr lang="en-US"/>
-          </a:p>
-        </p:txBody>
       </p:sp>
       <p:sp>
         <p:nvSpPr>
@@ -10119,11 +9833,11 @@
           <a:bodyPr wrap="square" lIns="0" tIns="0" rIns="0" bIns="0" rtlCol="0" anchor="ctr"/>
           <a:lstStyle/>
           <a:p>
-            <a:pPr marL="0" indent="0">
-              <a:buNone/>
-            </a:pPr>
-            <a:r>
-              <a:rPr lang="en-US" sz="1000" b="1" kern="0" spc="200" dirty="0">
+            <a:pPr indent="0" marL="0">
+              <a:buNone/>
+            </a:pPr>
+            <a:r>
+              <a:rPr lang="en-US" sz="1000" b="1" spc="200" kern="0" dirty="0">
                 <a:solidFill>
                   <a:srgbClr val="6EE7A8"/>
                 </a:solidFill>
@@ -10158,7 +9872,7 @@
           <a:bodyPr wrap="square" lIns="0" tIns="0" rIns="0" bIns="0" rtlCol="0" anchor="t"/>
           <a:lstStyle/>
           <a:p>
-            <a:pPr marL="0" indent="0">
+            <a:pPr indent="0" marL="0">
               <a:buNone/>
             </a:pPr>
             <a:r>
@@ -10197,7 +9911,7 @@
           <a:bodyPr wrap="square" lIns="0" tIns="0" rIns="0" bIns="0" rtlCol="0" anchor="t"/>
           <a:lstStyle/>
           <a:p>
-            <a:pPr marL="0" indent="0">
+            <a:pPr indent="0" marL="0">
               <a:buNone/>
             </a:pPr>
             <a:r>
@@ -10234,13 +9948,6 @@
           </a:solidFill>
           <a:ln/>
         </p:spPr>
-        <p:txBody>
-          <a:bodyPr/>
-          <a:lstStyle/>
-          <a:p>
-            <a:endParaRPr lang="en-US"/>
-          </a:p>
-        </p:txBody>
       </p:sp>
       <p:sp>
         <p:nvSpPr>
@@ -10263,7 +9970,7 @@
           <a:bodyPr wrap="square" lIns="0" tIns="0" rIns="0" bIns="0" rtlCol="0" anchor="ctr"/>
           <a:lstStyle/>
           <a:p>
-            <a:pPr marL="0" indent="0" algn="ctr">
+            <a:pPr algn="ctr" indent="0" marL="0">
               <a:buNone/>
             </a:pPr>
             <a:r>
@@ -10300,13 +10007,6 @@
           </a:solidFill>
           <a:ln/>
         </p:spPr>
-        <p:txBody>
-          <a:bodyPr/>
-          <a:lstStyle/>
-          <a:p>
-            <a:endParaRPr lang="en-US"/>
-          </a:p>
-        </p:txBody>
       </p:sp>
       <p:sp>
         <p:nvSpPr>
@@ -10329,7 +10029,7 @@
           <a:bodyPr wrap="square" lIns="0" tIns="0" rIns="0" bIns="0" rtlCol="0" anchor="ctr"/>
           <a:lstStyle/>
           <a:p>
-            <a:pPr marL="0" indent="0" algn="ctr">
+            <a:pPr algn="ctr" indent="0" marL="0">
               <a:buNone/>
             </a:pPr>
             <a:r>
@@ -10366,13 +10066,6 @@
           </a:solidFill>
           <a:ln/>
         </p:spPr>
-        <p:txBody>
-          <a:bodyPr/>
-          <a:lstStyle/>
-          <a:p>
-            <a:endParaRPr lang="en-US"/>
-          </a:p>
-        </p:txBody>
       </p:sp>
       <p:sp>
         <p:nvSpPr>
@@ -10395,7 +10088,7 @@
           <a:bodyPr wrap="square" lIns="0" tIns="0" rIns="0" bIns="0" rtlCol="0" anchor="ctr"/>
           <a:lstStyle/>
           <a:p>
-            <a:pPr marL="0" indent="0" algn="ctr">
+            <a:pPr algn="ctr" indent="0" marL="0">
               <a:buNone/>
             </a:pPr>
             <a:r>
@@ -10432,13 +10125,6 @@
           </a:solidFill>
           <a:ln/>
         </p:spPr>
-        <p:txBody>
-          <a:bodyPr/>
-          <a:lstStyle/>
-          <a:p>
-            <a:endParaRPr lang="en-US"/>
-          </a:p>
-        </p:txBody>
       </p:sp>
       <p:sp>
         <p:nvSpPr>
@@ -10461,7 +10147,7 @@
           <a:bodyPr wrap="square" lIns="0" tIns="0" rIns="0" bIns="0" rtlCol="0" anchor="ctr"/>
           <a:lstStyle/>
           <a:p>
-            <a:pPr marL="0" indent="0" algn="ctr">
+            <a:pPr algn="ctr" indent="0" marL="0">
               <a:buNone/>
             </a:pPr>
             <a:r>
@@ -10498,13 +10184,6 @@
           </a:solidFill>
           <a:ln/>
         </p:spPr>
-        <p:txBody>
-          <a:bodyPr/>
-          <a:lstStyle/>
-          <a:p>
-            <a:endParaRPr lang="en-US"/>
-          </a:p>
-        </p:txBody>
       </p:sp>
       <p:sp>
         <p:nvSpPr>
@@ -10527,7 +10206,7 @@
           <a:bodyPr wrap="square" lIns="0" tIns="0" rIns="0" bIns="0" rtlCol="0" anchor="ctr"/>
           <a:lstStyle/>
           <a:p>
-            <a:pPr marL="0" indent="0" algn="ctr">
+            <a:pPr algn="ctr" indent="0" marL="0">
               <a:buNone/>
             </a:pPr>
             <a:r>
@@ -10564,13 +10243,6 @@
           </a:solidFill>
           <a:ln/>
         </p:spPr>
-        <p:txBody>
-          <a:bodyPr/>
-          <a:lstStyle/>
-          <a:p>
-            <a:endParaRPr lang="en-US"/>
-          </a:p>
-        </p:txBody>
       </p:sp>
       <p:sp>
         <p:nvSpPr>
@@ -10593,7 +10265,7 @@
           <a:bodyPr wrap="square" lIns="0" tIns="0" rIns="0" bIns="0" rtlCol="0" anchor="ctr"/>
           <a:lstStyle/>
           <a:p>
-            <a:pPr marL="0" indent="0" algn="ctr">
+            <a:pPr algn="ctr" indent="0" marL="0">
               <a:buNone/>
             </a:pPr>
             <a:r>
@@ -10630,13 +10302,6 @@
           </a:solidFill>
           <a:ln/>
         </p:spPr>
-        <p:txBody>
-          <a:bodyPr/>
-          <a:lstStyle/>
-          <a:p>
-            <a:endParaRPr lang="en-US"/>
-          </a:p>
-        </p:txBody>
       </p:sp>
       <p:sp>
         <p:nvSpPr>
@@ -10657,13 +10322,6 @@
           </a:solidFill>
           <a:ln/>
         </p:spPr>
-        <p:txBody>
-          <a:bodyPr/>
-          <a:lstStyle/>
-          <a:p>
-            <a:endParaRPr lang="en-US"/>
-          </a:p>
-        </p:txBody>
       </p:sp>
       <p:sp>
         <p:nvSpPr>
@@ -10686,7 +10344,7 @@
           <a:bodyPr wrap="square" lIns="0" tIns="0" rIns="0" bIns="0" rtlCol="0" anchor="t"/>
           <a:lstStyle/>
           <a:p>
-            <a:pPr marL="0" indent="0">
+            <a:pPr indent="0" marL="0">
               <a:buNone/>
             </a:pPr>
             <a:r>
@@ -10725,7 +10383,7 @@
           <a:bodyPr wrap="square" lIns="0" tIns="0" rIns="0" bIns="0" rtlCol="0" anchor="t"/>
           <a:lstStyle/>
           <a:p>
-            <a:pPr marL="0" indent="0">
+            <a:pPr indent="0" marL="0">
               <a:buNone/>
             </a:pPr>
             <a:r>
@@ -10762,13 +10420,6 @@
           </a:solidFill>
           <a:ln/>
         </p:spPr>
-        <p:txBody>
-          <a:bodyPr/>
-          <a:lstStyle/>
-          <a:p>
-            <a:endParaRPr lang="en-US"/>
-          </a:p>
-        </p:txBody>
       </p:sp>
       <p:sp>
         <p:nvSpPr>
@@ -10789,13 +10440,6 @@
           </a:solidFill>
           <a:ln/>
         </p:spPr>
-        <p:txBody>
-          <a:bodyPr/>
-          <a:lstStyle/>
-          <a:p>
-            <a:endParaRPr lang="en-US"/>
-          </a:p>
-        </p:txBody>
       </p:sp>
       <p:sp>
         <p:nvSpPr>
@@ -10818,7 +10462,7 @@
           <a:bodyPr wrap="square" lIns="0" tIns="0" rIns="0" bIns="0" rtlCol="0" anchor="t"/>
           <a:lstStyle/>
           <a:p>
-            <a:pPr marL="0" indent="0">
+            <a:pPr indent="0" marL="0">
               <a:buNone/>
             </a:pPr>
             <a:r>
@@ -10857,7 +10501,7 @@
           <a:bodyPr wrap="square" lIns="0" tIns="0" rIns="0" bIns="0" rtlCol="0" anchor="t"/>
           <a:lstStyle/>
           <a:p>
-            <a:pPr marL="0" indent="0">
+            <a:pPr indent="0" marL="0">
               <a:buNone/>
             </a:pPr>
             <a:r>
@@ -10894,13 +10538,6 @@
           </a:solidFill>
           <a:ln/>
         </p:spPr>
-        <p:txBody>
-          <a:bodyPr/>
-          <a:lstStyle/>
-          <a:p>
-            <a:endParaRPr lang="en-US"/>
-          </a:p>
-        </p:txBody>
       </p:sp>
       <p:sp>
         <p:nvSpPr>
@@ -10921,13 +10558,6 @@
           </a:solidFill>
           <a:ln/>
         </p:spPr>
-        <p:txBody>
-          <a:bodyPr/>
-          <a:lstStyle/>
-          <a:p>
-            <a:endParaRPr lang="en-US"/>
-          </a:p>
-        </p:txBody>
       </p:sp>
       <p:sp>
         <p:nvSpPr>
@@ -10950,7 +10580,7 @@
           <a:bodyPr wrap="square" lIns="0" tIns="0" rIns="0" bIns="0" rtlCol="0" anchor="t"/>
           <a:lstStyle/>
           <a:p>
-            <a:pPr marL="0" indent="0">
+            <a:pPr indent="0" marL="0">
               <a:buNone/>
             </a:pPr>
             <a:r>
@@ -10989,7 +10619,7 @@
           <a:bodyPr wrap="square" lIns="0" tIns="0" rIns="0" bIns="0" rtlCol="0" anchor="t"/>
           <a:lstStyle/>
           <a:p>
-            <a:pPr marL="0" indent="0">
+            <a:pPr indent="0" marL="0">
               <a:buNone/>
             </a:pPr>
             <a:r>
@@ -11028,7 +10658,7 @@
           <a:bodyPr wrap="square" lIns="0" tIns="0" rIns="0" bIns="0" rtlCol="0" anchor="ctr"/>
           <a:lstStyle/>
           <a:p>
-            <a:pPr marL="0" indent="0">
+            <a:pPr indent="0" marL="0">
               <a:buNone/>
             </a:pPr>
             <a:r>
@@ -11062,7 +10692,6 @@
         <a:solidFill>
           <a:srgbClr val="0B0E14"/>
         </a:solidFill>
-        <a:effectLst/>
       </p:bgPr>
     </p:bg>
     <p:spTree>
@@ -11098,13 +10727,6 @@
           </a:solidFill>
           <a:ln/>
         </p:spPr>
-        <p:txBody>
-          <a:bodyPr/>
-          <a:lstStyle/>
-          <a:p>
-            <a:endParaRPr lang="en-US"/>
-          </a:p>
-        </p:txBody>
       </p:sp>
       <p:sp>
         <p:nvSpPr>
@@ -11127,11 +10749,11 @@
           <a:bodyPr wrap="square" lIns="0" tIns="0" rIns="0" bIns="0" rtlCol="0" anchor="ctr"/>
           <a:lstStyle/>
           <a:p>
-            <a:pPr marL="0" indent="0">
-              <a:buNone/>
-            </a:pPr>
-            <a:r>
-              <a:rPr lang="en-US" sz="1000" b="1" kern="0" spc="200" dirty="0">
+            <a:pPr indent="0" marL="0">
+              <a:buNone/>
+            </a:pPr>
+            <a:r>
+              <a:rPr lang="en-US" sz="1000" b="1" spc="200" kern="0" dirty="0">
                 <a:solidFill>
                   <a:srgbClr val="6EE7A8"/>
                 </a:solidFill>
@@ -11166,7 +10788,7 @@
           <a:bodyPr wrap="square" lIns="0" tIns="0" rIns="0" bIns="0" rtlCol="0" anchor="t"/>
           <a:lstStyle/>
           <a:p>
-            <a:pPr marL="0" indent="0">
+            <a:pPr indent="0" marL="0">
               <a:buNone/>
             </a:pPr>
             <a:r>
@@ -11205,7 +10827,7 @@
           <a:bodyPr wrap="square" lIns="0" tIns="0" rIns="0" bIns="0" rtlCol="0" anchor="t"/>
           <a:lstStyle/>
           <a:p>
-            <a:pPr marL="0" indent="0">
+            <a:pPr indent="0" marL="0">
               <a:buNone/>
             </a:pPr>
             <a:r>
@@ -11242,13 +10864,6 @@
           </a:solidFill>
           <a:ln/>
         </p:spPr>
-        <p:txBody>
-          <a:bodyPr/>
-          <a:lstStyle/>
-          <a:p>
-            <a:endParaRPr lang="en-US"/>
-          </a:p>
-        </p:txBody>
       </p:sp>
       <p:sp>
         <p:nvSpPr>
@@ -11269,13 +10884,6 @@
           </a:solidFill>
           <a:ln/>
         </p:spPr>
-        <p:txBody>
-          <a:bodyPr/>
-          <a:lstStyle/>
-          <a:p>
-            <a:endParaRPr lang="en-US"/>
-          </a:p>
-        </p:txBody>
       </p:sp>
       <p:sp>
         <p:nvSpPr>
@@ -11298,11 +10906,11 @@
           <a:bodyPr wrap="square" lIns="0" tIns="0" rIns="0" bIns="0" rtlCol="0" anchor="ctr"/>
           <a:lstStyle/>
           <a:p>
-            <a:pPr marL="0" indent="0">
-              <a:buNone/>
-            </a:pPr>
-            <a:r>
-              <a:rPr lang="en-US" sz="1000" kern="0" spc="100" dirty="0">
+            <a:pPr indent="0" marL="0">
+              <a:buNone/>
+            </a:pPr>
+            <a:r>
+              <a:rPr lang="en-US" sz="1000" spc="100" kern="0" dirty="0">
                 <a:solidFill>
                   <a:srgbClr val="AEBACB"/>
                 </a:solidFill>
@@ -11312,6 +10920,9 @@
               </a:rPr>
               <a:t>WATCHLIST   </a:t>
             </a:r>
+            <a:pPr indent="0" marL="0">
+              <a:buNone/>
+            </a:pPr>
             <a:r>
               <a:rPr lang="en-US" sz="2200" b="1" dirty="0">
                 <a:solidFill>
@@ -11348,11 +10959,11 @@
           <a:bodyPr wrap="square" lIns="0" tIns="0" rIns="0" bIns="0" rtlCol="0" anchor="ctr"/>
           <a:lstStyle/>
           <a:p>
-            <a:pPr marL="0" indent="0">
-              <a:buNone/>
-            </a:pPr>
-            <a:r>
-              <a:rPr lang="en-US" sz="1000" kern="0" spc="100" dirty="0">
+            <a:pPr indent="0" marL="0">
+              <a:buNone/>
+            </a:pPr>
+            <a:r>
+              <a:rPr lang="en-US" sz="1000" spc="100" kern="0" dirty="0">
                 <a:solidFill>
                   <a:srgbClr val="AEBACB"/>
                 </a:solidFill>
@@ -11362,6 +10973,9 @@
               </a:rPr>
               <a:t>CAMERA READ   </a:t>
             </a:r>
+            <a:pPr indent="0" marL="0">
+              <a:buNone/>
+            </a:pPr>
             <a:r>
               <a:rPr lang="en-US" sz="2200" b="1" dirty="0">
                 <a:solidFill>
@@ -11398,7 +11012,7 @@
           <a:bodyPr wrap="square" lIns="0" tIns="0" rIns="0" bIns="0" rtlCol="0" anchor="ctr"/>
           <a:lstStyle/>
           <a:p>
-            <a:pPr marL="0" indent="0">
+            <a:pPr indent="0" marL="0">
               <a:buNone/>
             </a:pPr>
             <a:r>
@@ -11437,11 +11051,11 @@
           <a:bodyPr wrap="square" lIns="0" tIns="0" rIns="0" bIns="0" rtlCol="0" anchor="ctr"/>
           <a:lstStyle/>
           <a:p>
-            <a:pPr marL="0" indent="0">
-              <a:buNone/>
-            </a:pPr>
-            <a:r>
-              <a:rPr lang="en-US" sz="1500" b="1" kern="0" spc="100" dirty="0">
+            <a:pPr indent="0" marL="0">
+              <a:buNone/>
+            </a:pPr>
+            <a:r>
+              <a:rPr lang="en-US" sz="1500" b="1" spc="100" kern="0" dirty="0">
                 <a:solidFill>
                   <a:srgbClr val="6EE7A8"/>
                 </a:solidFill>
@@ -11476,7 +11090,7 @@
           <a:bodyPr wrap="square" lIns="0" tIns="0" rIns="0" bIns="0" rtlCol="0" anchor="ctr"/>
           <a:lstStyle/>
           <a:p>
-            <a:pPr marL="0" indent="0">
+            <a:pPr indent="0" marL="0">
               <a:buNone/>
             </a:pPr>
             <a:r>
@@ -11515,7 +11129,7 @@
           <a:bodyPr wrap="square" lIns="0" tIns="0" rIns="0" bIns="0" rtlCol="0" anchor="ctr"/>
           <a:lstStyle/>
           <a:p>
-            <a:pPr marL="0" indent="0">
+            <a:pPr indent="0" marL="0">
               <a:buNone/>
             </a:pPr>
             <a:r>
@@ -11554,7 +11168,7 @@
           <a:bodyPr wrap="square" lIns="0" tIns="0" rIns="0" bIns="0" rtlCol="0" anchor="ctr"/>
           <a:lstStyle/>
           <a:p>
-            <a:pPr marL="0" indent="0">
+            <a:pPr indent="0" marL="0">
               <a:buNone/>
             </a:pPr>
             <a:r>
@@ -11873,319 +11487,4 @@
     </a:ext>
   </a:extLst>
 </a:theme>
-</file>
-
-<file path=ppt/theme/theme2.xml><?xml version="1.0" encoding="utf-8"?>
-<a:theme xmlns:a="http://schemas.openxmlformats.org/drawingml/2006/main" name="Office Theme">
-  <a:themeElements>
-    <a:clrScheme name="Office">
-      <a:dk1>
-        <a:sysClr val="windowText" lastClr="000000"/>
-      </a:dk1>
-      <a:lt1>
-        <a:sysClr val="window" lastClr="FFFFFF"/>
-      </a:lt1>
-      <a:dk2>
-        <a:srgbClr val="0E2841"/>
-      </a:dk2>
-      <a:lt2>
-        <a:srgbClr val="E8E8E8"/>
-      </a:lt2>
-      <a:accent1>
-        <a:srgbClr val="156082"/>
-      </a:accent1>
-      <a:accent2>
-        <a:srgbClr val="E97132"/>
-      </a:accent2>
-      <a:accent3>
-        <a:srgbClr val="196B24"/>
-      </a:accent3>
-      <a:accent4>
-        <a:srgbClr val="0F9ED5"/>
-      </a:accent4>
-      <a:accent5>
-        <a:srgbClr val="A02B93"/>
-      </a:accent5>
-      <a:accent6>
-        <a:srgbClr val="4EA72E"/>
-      </a:accent6>
-      <a:hlink>
-        <a:srgbClr val="467886"/>
-      </a:hlink>
-      <a:folHlink>
-        <a:srgbClr val="96607D"/>
-      </a:folHlink>
-    </a:clrScheme>
-    <a:fontScheme name="Office">
-      <a:majorFont>
-        <a:latin typeface="Aptos Display" panose="02110004020202020204"/>
-        <a:ea typeface=""/>
-        <a:cs typeface=""/>
-        <a:font script="Jpan" typeface="游ゴシック Light"/>
-        <a:font script="Hang" typeface="맑은 고딕"/>
-        <a:font script="Hans" typeface="等线 Light"/>
-        <a:font script="Hant" typeface="新細明體"/>
-        <a:font script="Arab" typeface="Times New Roman"/>
-        <a:font script="Hebr" typeface="Times New Roman"/>
-        <a:font script="Thai" typeface="Angsana New"/>
-        <a:font script="Ethi" typeface="Nyala"/>
-        <a:font script="Beng" typeface="Vrinda"/>
-        <a:font script="Gujr" typeface="Shruti"/>
-        <a:font script="Khmr" typeface="MoolBoran"/>
-        <a:font script="Knda" typeface="Tunga"/>
-        <a:font script="Guru" typeface="Raavi"/>
-        <a:font script="Cans" typeface="Euphemia"/>
-        <a:font script="Cher" typeface="Plantagenet Cherokee"/>
-        <a:font script="Yiii" typeface="Microsoft Yi Baiti"/>
-        <a:font script="Tibt" typeface="Microsoft Himalaya"/>
-        <a:font script="Thaa" typeface="MV Boli"/>
-        <a:font script="Deva" typeface="Mangal"/>
-        <a:font script="Telu" typeface="Gautami"/>
-        <a:font script="Taml" typeface="Latha"/>
-        <a:font script="Syrc" typeface="Estrangelo Edessa"/>
-        <a:font script="Orya" typeface="Kalinga"/>
-        <a:font script="Mlym" typeface="Kartika"/>
-        <a:font script="Laoo" typeface="DokChampa"/>
-        <a:font script="Sinh" typeface="Iskoola Pota"/>
-        <a:font script="Mong" typeface="Mongolian Baiti"/>
-        <a:font script="Viet" typeface="Times New Roman"/>
-        <a:font script="Uigh" typeface="Microsoft Uighur"/>
-        <a:font script="Geor" typeface="Sylfaen"/>
-        <a:font script="Armn" typeface="Arial"/>
-        <a:font script="Bugi" typeface="Leelawadee UI"/>
-        <a:font script="Bopo" typeface="Microsoft JhengHei"/>
-        <a:font script="Java" typeface="Javanese Text"/>
-        <a:font script="Lisu" typeface="Segoe UI"/>
-        <a:font script="Mymr" typeface="Myanmar Text"/>
-        <a:font script="Nkoo" typeface="Ebrima"/>
-        <a:font script="Olck" typeface="Nirmala UI"/>
-        <a:font script="Osma" typeface="Ebrima"/>
-        <a:font script="Phag" typeface="Phagspa"/>
-        <a:font script="Syrn" typeface="Estrangelo Edessa"/>
-        <a:font script="Syrj" typeface="Estrangelo Edessa"/>
-        <a:font script="Syre" typeface="Estrangelo Edessa"/>
-        <a:font script="Sora" typeface="Nirmala UI"/>
-        <a:font script="Tale" typeface="Microsoft Tai Le"/>
-        <a:font script="Talu" typeface="Microsoft New Tai Lue"/>
-        <a:font script="Tfng" typeface="Ebrima"/>
-      </a:majorFont>
-      <a:minorFont>
-        <a:latin typeface="Aptos" panose="02110004020202020204"/>
-        <a:ea typeface=""/>
-        <a:cs typeface=""/>
-        <a:font script="Jpan" typeface="游ゴシック"/>
-        <a:font script="Hang" typeface="맑은 고딕"/>
-        <a:font script="Hans" typeface="等线"/>
-        <a:font script="Hant" typeface="新細明體"/>
-        <a:font script="Arab" typeface="Arial"/>
-        <a:font script="Hebr" typeface="Arial"/>
-        <a:font script="Thai" typeface="Cordia New"/>
-        <a:font script="Ethi" typeface="Nyala"/>
-        <a:font script="Beng" typeface="Vrinda"/>
-        <a:font script="Gujr" typeface="Shruti"/>
-        <a:font script="Khmr" typeface="DaunPenh"/>
-        <a:font script="Knda" typeface="Tunga"/>
-        <a:font script="Guru" typeface="Raavi"/>
-        <a:font script="Cans" typeface="Euphemia"/>
-        <a:font script="Cher" typeface="Plantagenet Cherokee"/>
-        <a:font script="Yiii" typeface="Microsoft Yi Baiti"/>
-        <a:font script="Tibt" typeface="Microsoft Himalaya"/>
-        <a:font script="Thaa" typeface="MV Boli"/>
-        <a:font script="Deva" typeface="Mangal"/>
-        <a:font script="Telu" typeface="Gautami"/>
-        <a:font script="Taml" typeface="Latha"/>
-        <a:font script="Syrc" typeface="Estrangelo Edessa"/>
-        <a:font script="Orya" typeface="Kalinga"/>
-        <a:font script="Mlym" typeface="Kartika"/>
-        <a:font script="Laoo" typeface="DokChampa"/>
-        <a:font script="Sinh" typeface="Iskoola Pota"/>
-        <a:font script="Mong" typeface="Mongolian Baiti"/>
-        <a:font script="Viet" typeface="Arial"/>
-        <a:font script="Uigh" typeface="Microsoft Uighur"/>
-        <a:font script="Geor" typeface="Sylfaen"/>
-        <a:font script="Armn" typeface="Arial"/>
-        <a:font script="Bugi" typeface="Leelawadee UI"/>
-        <a:font script="Bopo" typeface="Microsoft JhengHei"/>
-        <a:font script="Java" typeface="Javanese Text"/>
-        <a:font script="Lisu" typeface="Segoe UI"/>
-        <a:font script="Mymr" typeface="Myanmar Text"/>
-        <a:font script="Nkoo" typeface="Ebrima"/>
-        <a:font script="Olck" typeface="Nirmala UI"/>
-        <a:font script="Osma" typeface="Ebrima"/>
-        <a:font script="Phag" typeface="Phagspa"/>
-        <a:font script="Syrn" typeface="Estrangelo Edessa"/>
-        <a:font script="Syrj" typeface="Estrangelo Edessa"/>
-        <a:font script="Syre" typeface="Estrangelo Edessa"/>
-        <a:font script="Sora" typeface="Nirmala UI"/>
-        <a:font script="Tale" typeface="Microsoft Tai Le"/>
-        <a:font script="Talu" typeface="Microsoft New Tai Lue"/>
-        <a:font script="Tfng" typeface="Ebrima"/>
-      </a:minorFont>
-    </a:fontScheme>
-    <a:fmtScheme name="Office">
-      <a:fillStyleLst>
-        <a:solidFill>
-          <a:schemeClr val="phClr"/>
-        </a:solidFill>
-        <a:gradFill rotWithShape="1">
-          <a:gsLst>
-            <a:gs pos="0">
-              <a:schemeClr val="phClr">
-                <a:lumMod val="110000"/>
-                <a:satMod val="105000"/>
-                <a:tint val="67000"/>
-              </a:schemeClr>
-            </a:gs>
-            <a:gs pos="50000">
-              <a:schemeClr val="phClr">
-                <a:lumMod val="105000"/>
-                <a:satMod val="103000"/>
-                <a:tint val="73000"/>
-              </a:schemeClr>
-            </a:gs>
-            <a:gs pos="100000">
-              <a:schemeClr val="phClr">
-                <a:lumMod val="105000"/>
-                <a:satMod val="109000"/>
-                <a:tint val="81000"/>
-              </a:schemeClr>
-            </a:gs>
-          </a:gsLst>
-          <a:lin ang="5400000" scaled="0"/>
-        </a:gradFill>
-        <a:gradFill rotWithShape="1">
-          <a:gsLst>
-            <a:gs pos="0">
-              <a:schemeClr val="phClr">
-                <a:satMod val="103000"/>
-                <a:lumMod val="102000"/>
-                <a:tint val="94000"/>
-              </a:schemeClr>
-            </a:gs>
-            <a:gs pos="50000">
-              <a:schemeClr val="phClr">
-                <a:satMod val="110000"/>
-                <a:lumMod val="100000"/>
-                <a:shade val="100000"/>
-              </a:schemeClr>
-            </a:gs>
-            <a:gs pos="100000">
-              <a:schemeClr val="phClr">
-                <a:lumMod val="99000"/>
-                <a:satMod val="120000"/>
-                <a:shade val="78000"/>
-              </a:schemeClr>
-            </a:gs>
-          </a:gsLst>
-          <a:lin ang="5400000" scaled="0"/>
-        </a:gradFill>
-      </a:fillStyleLst>
-      <a:lnStyleLst>
-        <a:ln w="12700" cap="flat" cmpd="sng" algn="ctr">
-          <a:solidFill>
-            <a:schemeClr val="phClr"/>
-          </a:solidFill>
-          <a:prstDash val="solid"/>
-          <a:miter lim="800000"/>
-        </a:ln>
-        <a:ln w="19050" cap="flat" cmpd="sng" algn="ctr">
-          <a:solidFill>
-            <a:schemeClr val="phClr"/>
-          </a:solidFill>
-          <a:prstDash val="solid"/>
-          <a:miter lim="800000"/>
-        </a:ln>
-        <a:ln w="25400" cap="flat" cmpd="sng" algn="ctr">
-          <a:solidFill>
-            <a:schemeClr val="phClr"/>
-          </a:solidFill>
-          <a:prstDash val="solid"/>
-          <a:miter lim="800000"/>
-        </a:ln>
-      </a:lnStyleLst>
-      <a:effectStyleLst>
-        <a:effectStyle>
-          <a:effectLst/>
-        </a:effectStyle>
-        <a:effectStyle>
-          <a:effectLst/>
-        </a:effectStyle>
-        <a:effectStyle>
-          <a:effectLst>
-            <a:outerShdw blurRad="57150" dist="19050" dir="5400000" algn="ctr" rotWithShape="0">
-              <a:srgbClr val="000000">
-                <a:alpha val="63000"/>
-              </a:srgbClr>
-            </a:outerShdw>
-          </a:effectLst>
-        </a:effectStyle>
-      </a:effectStyleLst>
-      <a:bgFillStyleLst>
-        <a:solidFill>
-          <a:schemeClr val="phClr"/>
-        </a:solidFill>
-        <a:solidFill>
-          <a:schemeClr val="phClr">
-            <a:tint val="95000"/>
-            <a:satMod val="170000"/>
-          </a:schemeClr>
-        </a:solidFill>
-        <a:gradFill rotWithShape="1">
-          <a:gsLst>
-            <a:gs pos="0">
-              <a:schemeClr val="phClr">
-                <a:tint val="93000"/>
-                <a:satMod val="150000"/>
-                <a:shade val="98000"/>
-                <a:lumMod val="102000"/>
-              </a:schemeClr>
-            </a:gs>
-            <a:gs pos="50000">
-              <a:schemeClr val="phClr">
-                <a:tint val="98000"/>
-                <a:satMod val="130000"/>
-                <a:shade val="90000"/>
-                <a:lumMod val="103000"/>
-              </a:schemeClr>
-            </a:gs>
-            <a:gs pos="100000">
-              <a:schemeClr val="phClr">
-                <a:shade val="63000"/>
-                <a:satMod val="120000"/>
-              </a:schemeClr>
-            </a:gs>
-          </a:gsLst>
-          <a:lin ang="5400000" scaled="0"/>
-        </a:gradFill>
-      </a:bgFillStyleLst>
-    </a:fmtScheme>
-  </a:themeElements>
-  <a:objectDefaults>
-    <a:lnDef>
-      <a:spPr/>
-      <a:bodyPr/>
-      <a:lstStyle/>
-      <a:style>
-        <a:lnRef idx="2">
-          <a:schemeClr val="accent1"/>
-        </a:lnRef>
-        <a:fillRef idx="0">
-          <a:schemeClr val="accent1"/>
-        </a:fillRef>
-        <a:effectRef idx="1">
-          <a:schemeClr val="accent1"/>
-        </a:effectRef>
-        <a:fontRef idx="minor">
-          <a:schemeClr val="tx1"/>
-        </a:fontRef>
-      </a:style>
-    </a:lnDef>
-  </a:objectDefaults>
-  <a:extraClrSchemeLst/>
-  <a:extLst>
-    <a:ext uri="{05A4C25C-085E-4340-85A3-A5531E510DB2}">
-      <thm15:themeFamily xmlns:thm15="http://schemas.microsoft.com/office/thememl/2012/main" name="Office Theme" id="{2E142A2C-CD16-42D6-873A-C26D2A0506FA}" vid="{1BDDFF52-6CD6-40A5-AB3C-68EB2F1E4D0A}"/>
-    </a:ext>
-  </a:extLst>
-</a:theme>
 </file>
--- a/docs/Sentinel-Platform-Deck.pptx
+++ b/docs/Sentinel-Platform-Deck.pptx
@@ -5694,7 +5694,7 @@
                 <a:ea typeface="Arial" pitchFamily="34" charset="-122"/>
                 <a:cs typeface="Arial" pitchFamily="34" charset="-120"/>
               </a:rPr>
-              <a:t>Zones, tamper, vehicle colour</a:t>
+              <a:t>Zones, tamper, colour, people count</a:t>
             </a:r>
             <a:endParaRPr lang="en-US" sz="1100" dirty="0"/>
           </a:p>
@@ -5837,7 +5837,7 @@
                 <a:ea typeface="Arial" pitchFamily="34" charset="-122"/>
                 <a:cs typeface="Arial" pitchFamily="34" charset="-120"/>
               </a:rPr>
-              <a:t>An ANPR accuracy number</a:t>
+              <a:t>ANPR accuracy beyond one camera</a:t>
             </a:r>
             <a:endParaRPr lang="en-US" sz="1100" dirty="0"/>
           </a:p>
@@ -9754,7 +9754,7 @@
                 <a:ea typeface="Arial" pitchFamily="34" charset="-122"/>
                 <a:cs typeface="Arial" pitchFamily="34" charset="-120"/>
               </a:rPr>
-              <a:t>VAHAN / SARTHI / eGujCop / AFIS registry clients</a:t>
+              <a:t>VAHAN / SARTHI / eGujCop / AFIS / NAFIS clients</a:t>
             </a:r>
             <a:endParaRPr lang="en-US" sz="1250" dirty="0"/>
           </a:p>
@@ -10159,7 +10159,7 @@
                 <a:ea typeface="Arial" pitchFamily="34" charset="-122"/>
                 <a:cs typeface="Arial" pitchFamily="34" charset="-120"/>
               </a:rPr>
-              <a:t>Rectify</a:t>
+              <a:t>OCR</a:t>
             </a:r>
             <a:endParaRPr lang="en-US" sz="900" dirty="0"/>
           </a:p>
@@ -10218,7 +10218,7 @@
                 <a:ea typeface="Arial" pitchFamily="34" charset="-122"/>
                 <a:cs typeface="Arial" pitchFamily="34" charset="-120"/>
               </a:rPr>
-              <a:t>OCR</a:t>
+              <a:t>Grammar fix</a:t>
             </a:r>
             <a:endParaRPr lang="en-US" sz="900" dirty="0"/>
           </a:p>
@@ -10592,7 +10592,7 @@
                 <a:ea typeface="Trebuchet MS" pitchFamily="34" charset="-122"/>
                 <a:cs typeface="Trebuchet MS" pitchFamily="34" charset="-120"/>
               </a:rPr>
-              <a:t>No accuracy %</a:t>
+              <a:t>65% / 78%</a:t>
             </a:r>
             <a:endParaRPr lang="en-US" sz="2100" dirty="0"/>
           </a:p>
@@ -10631,7 +10631,7 @@
                 <a:ea typeface="Arial" pitchFamily="34" charset="-122"/>
                 <a:cs typeface="Arial" pitchFamily="34" charset="-120"/>
               </a:rPr>
-              <a:t>claimed — needs a hand-labelled holdout we do not have</a:t>
+              <a:t>exact per crop / voted, 81 labelled plates; target 85%</a:t>
             </a:r>
             <a:endParaRPr lang="en-US" sz="1050" dirty="0"/>
           </a:p>
@@ -10670,7 +10670,7 @@
                 <a:ea typeface="Arial" pitchFamily="34" charset="-122"/>
                 <a:cs typeface="Arial" pitchFamily="34" charset="-120"/>
               </a:rPr>
-              <a:t>The third box is the one worth reading.</a:t>
+              <a:t>The third box is measured, not estimated, and it is not yet good enough.</a:t>
             </a:r>
             <a:endParaRPr lang="en-US" sz="1200" dirty="0"/>
           </a:p>
